--- a/Courses/145060/units/unit-01-sequence-data-output/04-slides/exports/MCCTC_145060_Slides_W02_TypesAndInput.pptx
+++ b/Courses/145060/units/unit-01-sequence-data-output/04-slides/exports/MCCTC_145060_Slides_W02_TypesAndInput.pptx
@@ -29,24 +29,12 @@
       <p:regular r:id="rId201314"/>
     </p:embeddedFont>
     <p:embeddedFont>
-      <p:font typeface="Orbitron"/>
+      <p:font typeface="Roboto Condensed Bold"/>
       <p:regular r:id="rId201315"/>
     </p:embeddedFont>
     <p:embeddedFont>
-      <p:font typeface="Orbitron Black"/>
+      <p:font typeface="Roboto Condensed"/>
       <p:regular r:id="rId201316"/>
-    </p:embeddedFont>
-    <p:embeddedFont>
-      <p:font typeface="Roboto Condensed Black"/>
-      <p:regular r:id="rId201317"/>
-    </p:embeddedFont>
-    <p:embeddedFont>
-      <p:font typeface="Roboto Condensed Bold"/>
-      <p:regular r:id="rId201318"/>
-    </p:embeddedFont>
-    <p:embeddedFont>
-      <p:font typeface="Roboto Condensed"/>
-      <p:regular r:id="rId201319"/>
     </p:embeddedFont>
   </p:embeddedFontLst>
   <p:defaultTextStyle>
@@ -1331,7 +1319,7 @@
           <a:p>
             <a:r>
               <a:rPr lang="en-US" dirty="0"/>
-              <a:t>Write this sentence down. The dangerous bugs are the ones that do not crash. If I had written plus instead of times, Python would have raised a TypeError, pointed at the line, and I would have fixed it in ten seconds. Instead it succeeded. You find this one in October, when somebody reports a weird number in your text adventure, and by then you have no idea which line did it. An error message is a gift.</a:t>
+              <a:t>Write this sentence down. The dangerous bugs are the ones that do not crash. If I had written plus instead of times, Python would have raised a TypeError, pointed at the line, and I would have fixed it in ten seconds. Instead it succeeded. You find this one weeks later, when somebody reports a weird number in your text adventure, and by then you have no idea which line did it. An error message is a gift.</a:t>
             </a:r>
             <a:endParaRPr lang="en-US" dirty="0"/>
           </a:p>
@@ -1955,7 +1943,7 @@
         </p:blipFill>
         <p:spPr>
           <a:xfrm>
-            <a:off x="0" y="0"/>
+            <a:off x="7619809" y="0"/>
             <a:ext cx="4571886" cy="6858000"/>
           </a:xfrm>
           <a:prstGeom prst="rect">
@@ -1971,7 +1959,7 @@
         </p:nvSpPr>
         <p:spPr>
           <a:xfrm>
-            <a:off x="5233360" y="2776934"/>
+            <a:off x="661475" y="2776934"/>
             <a:ext cx="6296860" cy="1181298"/>
           </a:xfrm>
           <a:prstGeom prst="rect">
@@ -2264,7 +2252,7 @@
           <a:ln/>
         </p:spPr>
         <p:txBody>
-          <a:bodyPr wrap="none" lIns="0" tIns="99235" rIns="59541" bIns="0" rtlCol="0" anchor="t"/>
+          <a:bodyPr wrap="none" lIns="99235" tIns="0" rIns="59541" bIns="0" rtlCol="0" anchor="t"/>
           <a:lstStyle/>
           <a:p>
             <a:pPr algn="l" indent="0" marL="0">
@@ -2329,8 +2317,8 @@
         </p:blipFill>
         <p:spPr>
           <a:xfrm>
-            <a:off x="0" y="0"/>
-            <a:ext cx="4571886" cy="6858000"/>
+            <a:off x="661475" y="1411585"/>
+            <a:ext cx="6903269" cy="3911898"/>
           </a:xfrm>
           <a:prstGeom prst="rect">
             <a:avLst/>
@@ -2345,8 +2333,8 @@
         </p:nvSpPr>
         <p:spPr>
           <a:xfrm>
-            <a:off x="5233360" y="1931194"/>
-            <a:ext cx="6296860" cy="1181298"/>
+            <a:off x="8032251" y="1298079"/>
+            <a:ext cx="3504219" cy="2362597"/>
           </a:xfrm>
           <a:prstGeom prst="rect">
             <a:avLst/>
@@ -2389,8 +2377,8 @@
         </p:nvSpPr>
         <p:spPr>
           <a:xfrm>
-            <a:off x="5233360" y="3395960"/>
-            <a:ext cx="6296860" cy="1407914"/>
+            <a:off x="8032251" y="3849688"/>
+            <a:ext cx="3504219" cy="1710333"/>
           </a:xfrm>
           <a:prstGeom prst="rect">
             <a:avLst/>
@@ -2399,7 +2387,7 @@
           <a:ln/>
         </p:spPr>
         <p:txBody>
-          <a:bodyPr wrap="square" lIns="0" tIns="75608" rIns="0" bIns="0" rtlCol="0" anchor="t">
+          <a:bodyPr wrap="square" lIns="0" tIns="0" rIns="0" bIns="0" rtlCol="0" anchor="t">
             <a:normAutofit/>
           </a:bodyPr>
           <a:lstStyle/>
@@ -2497,7 +2485,7 @@
         </p:nvSpPr>
         <p:spPr>
           <a:xfrm>
-            <a:off x="4704141" y="6457255"/>
+            <a:off x="132255" y="6457255"/>
             <a:ext cx="3640642" cy="158750"/>
           </a:xfrm>
           <a:prstGeom prst="rect">
@@ -2507,7 +2495,7 @@
           <a:ln/>
         </p:spPr>
         <p:txBody>
-          <a:bodyPr wrap="none" lIns="0" tIns="99235" rIns="59541" bIns="0" rtlCol="0" anchor="t"/>
+          <a:bodyPr wrap="none" lIns="99235" tIns="0" rIns="59541" bIns="0" rtlCol="0" anchor="t"/>
           <a:lstStyle/>
           <a:p>
             <a:pPr algn="l" indent="0" marL="0">
@@ -2556,16 +2544,40 @@
           <a:chExt cx="0" cy="0"/>
         </a:xfrm>
       </p:grpSpPr>
-      <p:sp>
-        <p:nvSpPr>
-          <p:cNvPr id="2" name="Text 0"/>
+      <p:pic>
+        <p:nvPicPr>
+          <p:cNvPr id="2" name="Image 0" descr="preencoded.png">    </p:cNvPr>
+          <p:cNvPicPr>
+            <a:picLocks noChangeAspect="1"/>
+          </p:cNvPicPr>
+          <p:nvPr/>
+        </p:nvPicPr>
+        <p:blipFill>
+          <a:blip r:embed="rId1"/>
+          <a:stretch>
+            <a:fillRect/>
+          </a:stretch>
+        </p:blipFill>
+        <p:spPr>
+          <a:xfrm>
+            <a:off x="0" y="0"/>
+            <a:ext cx="4571886" cy="6858000"/>
+          </a:xfrm>
+          <a:prstGeom prst="rect">
+            <a:avLst/>
+          </a:prstGeom>
+        </p:spPr>
+      </p:pic>
+      <p:sp>
+        <p:nvSpPr>
+          <p:cNvPr id="3" name="Text 0"/>
           <p:cNvSpPr/>
           <p:nvPr/>
         </p:nvSpPr>
         <p:spPr>
           <a:xfrm>
-            <a:off x="661475" y="1494830"/>
-            <a:ext cx="10868745" cy="590649"/>
+            <a:off x="5233360" y="1931194"/>
+            <a:ext cx="6296860" cy="1181298"/>
           </a:xfrm>
           <a:prstGeom prst="rect">
             <a:avLst/>
@@ -2574,7 +2586,9 @@
           <a:ln/>
         </p:spPr>
         <p:txBody>
-          <a:bodyPr wrap="none" lIns="0" tIns="0" rIns="0" bIns="0" rtlCol="0" anchor="t"/>
+          <a:bodyPr wrap="square" lIns="0" tIns="0" rIns="0" bIns="0" rtlCol="0" anchor="t">
+            <a:normAutofit/>
+          </a:bodyPr>
           <a:lstStyle/>
           <a:p>
             <a:pPr algn="l" indent="0" marL="0">
@@ -2600,14 +2614,14 @@
       </p:sp>
       <p:sp>
         <p:nvSpPr>
-          <p:cNvPr id="3" name="Text 1"/>
+          <p:cNvPr id="4" name="Text 1"/>
           <p:cNvSpPr/>
           <p:nvPr/>
         </p:nvSpPr>
         <p:spPr>
           <a:xfrm>
-            <a:off x="661475" y="2463502"/>
-            <a:ext cx="378014" cy="236240"/>
+            <a:off x="5233360" y="3395960"/>
+            <a:ext cx="6296860" cy="1407914"/>
           </a:xfrm>
           <a:prstGeom prst="rect">
             <a:avLst/>
@@ -2616,118 +2630,17 @@
           <a:ln/>
         </p:spPr>
         <p:txBody>
-          <a:bodyPr wrap="none" lIns="0" tIns="0" rIns="0" bIns="0" rtlCol="0" anchor="ctr"/>
-          <a:lstStyle/>
-          <a:p>
-            <a:pPr algn="l" indent="0" marL="0">
-              <a:lnSpc>
-                <a:spcPct val="100000"/>
-              </a:lnSpc>
-              <a:buNone/>
-            </a:pPr>
-            <a:r>
-              <a:rPr lang="en-US" sz="1450" dirty="0">
-                <a:solidFill>
-                  <a:srgbClr val="1C1C1C"/>
-                </a:solidFill>
-                <a:latin typeface="Orbitron" pitchFamily="34" charset="0"/>
-                <a:ea typeface="Orbitron" pitchFamily="34" charset="-122"/>
-                <a:cs typeface="Orbitron" pitchFamily="34" charset="-120"/>
-              </a:rPr>
-              <a:t>01</a:t>
-            </a:r>
-            <a:endParaRPr lang="en-US" sz="1450" dirty="0"/>
-          </a:p>
-        </p:txBody>
-      </p:sp>
-      <p:sp>
-        <p:nvSpPr>
-          <p:cNvPr id="4" name="Shape 2"/>
-          <p:cNvSpPr/>
-          <p:nvPr/>
-        </p:nvSpPr>
-        <p:spPr>
-          <a:xfrm>
-            <a:off x="661475" y="2759373"/>
-            <a:ext cx="5339820" cy="25400"/>
-          </a:xfrm>
-          <a:prstGeom prst="rect">
-            <a:avLst/>
-          </a:prstGeom>
-          <a:solidFill>
-            <a:srgbClr val="57A1EB"/>
-          </a:solidFill>
-          <a:ln/>
-        </p:spPr>
-      </p:sp>
-      <p:sp>
-        <p:nvSpPr>
-          <p:cNvPr id="5" name="Text 3"/>
-          <p:cNvSpPr/>
-          <p:nvPr/>
-        </p:nvSpPr>
-        <p:spPr>
-          <a:xfrm>
-            <a:off x="661475" y="2904629"/>
-            <a:ext cx="5339820" cy="295275"/>
-          </a:xfrm>
-          <a:prstGeom prst="rect">
-            <a:avLst/>
-          </a:prstGeom>
-          <a:noFill/>
-          <a:ln/>
-        </p:spPr>
-        <p:txBody>
-          <a:bodyPr wrap="none" lIns="0" tIns="0" rIns="0" bIns="0" rtlCol="0" anchor="t"/>
-          <a:lstStyle/>
-          <a:p>
-            <a:pPr algn="l" indent="0" marL="0">
-              <a:lnSpc>
-                <a:spcPct val="104000"/>
-              </a:lnSpc>
-              <a:buNone/>
-            </a:pPr>
-            <a:r>
-              <a:rPr lang="en-US" sz="1850" b="1" dirty="0">
-                <a:solidFill>
-                  <a:srgbClr val="1C1C1C"/>
-                </a:solidFill>
-                <a:latin typeface="Orbitron Bold" pitchFamily="34" charset="0"/>
-                <a:ea typeface="Orbitron Bold" pitchFamily="34" charset="-122"/>
-                <a:cs typeface="Orbitron Bold" pitchFamily="34" charset="-120"/>
-              </a:rPr>
-              <a:t>Every number becomes a question</a:t>
-            </a:r>
-            <a:endParaRPr lang="en-US" sz="1850" dirty="0"/>
-          </a:p>
-        </p:txBody>
-      </p:sp>
-      <p:sp>
-        <p:nvSpPr>
-          <p:cNvPr id="6" name="Text 4"/>
-          <p:cNvSpPr/>
-          <p:nvPr/>
-        </p:nvSpPr>
-        <p:spPr>
-          <a:xfrm>
-            <a:off x="661475" y="3313311"/>
-            <a:ext cx="5339820" cy="302419"/>
-          </a:xfrm>
-          <a:prstGeom prst="rect">
-            <a:avLst/>
-          </a:prstGeom>
-          <a:noFill/>
-          <a:ln/>
-        </p:spPr>
-        <p:txBody>
-          <a:bodyPr wrap="none" lIns="0" tIns="0" rIns="0" bIns="0" rtlCol="0" anchor="t"/>
-          <a:lstStyle/>
-          <a:p>
-            <a:pPr algn="l" indent="0" marL="0">
+          <a:bodyPr wrap="square" lIns="0" tIns="0" rIns="0" bIns="0" rtlCol="0" anchor="t">
+            <a:normAutofit/>
+          </a:bodyPr>
+          <a:lstStyle/>
+          <a:p>
+            <a:pPr algn="l" marL="294640" indent="-294640">
               <a:lnSpc>
                 <a:spcPct val="133000"/>
               </a:lnSpc>
-              <a:buNone/>
+              <a:buSzPct val="100000"/>
+              <a:buChar char="•"/>
             </a:pPr>
             <a:r>
               <a:rPr lang="en-US" sz="1450" dirty="0">
@@ -2742,138 +2655,13 @@
             </a:r>
             <a:endParaRPr lang="en-US" sz="1450" dirty="0"/>
           </a:p>
-        </p:txBody>
-      </p:sp>
-      <p:sp>
-        <p:nvSpPr>
-          <p:cNvPr id="7" name="Text 5"/>
-          <p:cNvSpPr/>
-          <p:nvPr/>
-        </p:nvSpPr>
-        <p:spPr>
-          <a:xfrm>
-            <a:off x="6190301" y="2463502"/>
-            <a:ext cx="378014" cy="236240"/>
-          </a:xfrm>
-          <a:prstGeom prst="rect">
-            <a:avLst/>
-          </a:prstGeom>
-          <a:noFill/>
-          <a:ln/>
-        </p:spPr>
-        <p:txBody>
-          <a:bodyPr wrap="none" lIns="0" tIns="0" rIns="0" bIns="0" rtlCol="0" anchor="ctr"/>
-          <a:lstStyle/>
-          <a:p>
-            <a:pPr algn="l" indent="0" marL="0">
-              <a:lnSpc>
-                <a:spcPct val="100000"/>
-              </a:lnSpc>
-              <a:buNone/>
-            </a:pPr>
-            <a:r>
-              <a:rPr lang="en-US" sz="1450" dirty="0">
-                <a:solidFill>
-                  <a:srgbClr val="1C1C1C"/>
-                </a:solidFill>
-                <a:latin typeface="Orbitron" pitchFamily="34" charset="0"/>
-                <a:ea typeface="Orbitron" pitchFamily="34" charset="-122"/>
-                <a:cs typeface="Orbitron" pitchFamily="34" charset="-120"/>
-              </a:rPr>
-              <a:t>02</a:t>
-            </a:r>
-            <a:endParaRPr lang="en-US" sz="1450" dirty="0"/>
-          </a:p>
-        </p:txBody>
-      </p:sp>
-      <p:sp>
-        <p:nvSpPr>
-          <p:cNvPr id="8" name="Shape 6"/>
-          <p:cNvSpPr/>
-          <p:nvPr/>
-        </p:nvSpPr>
-        <p:spPr>
-          <a:xfrm>
-            <a:off x="6190301" y="2759373"/>
-            <a:ext cx="5339919" cy="25400"/>
-          </a:xfrm>
-          <a:prstGeom prst="rect">
-            <a:avLst/>
-          </a:prstGeom>
-          <a:solidFill>
-            <a:srgbClr val="57A1EB"/>
-          </a:solidFill>
-          <a:ln/>
-        </p:spPr>
-      </p:sp>
-      <p:sp>
-        <p:nvSpPr>
-          <p:cNvPr id="9" name="Text 7"/>
-          <p:cNvSpPr/>
-          <p:nvPr/>
-        </p:nvSpPr>
-        <p:spPr>
-          <a:xfrm>
-            <a:off x="6190301" y="2904629"/>
-            <a:ext cx="5339919" cy="295275"/>
-          </a:xfrm>
-          <a:prstGeom prst="rect">
-            <a:avLst/>
-          </a:prstGeom>
-          <a:noFill/>
-          <a:ln/>
-        </p:spPr>
-        <p:txBody>
-          <a:bodyPr wrap="none" lIns="0" tIns="0" rIns="0" bIns="0" rtlCol="0" anchor="t"/>
-          <a:lstStyle/>
-          <a:p>
-            <a:pPr algn="l" indent="0" marL="0">
-              <a:lnSpc>
-                <a:spcPct val="104000"/>
-              </a:lnSpc>
-              <a:buNone/>
-            </a:pPr>
-            <a:r>
-              <a:rPr lang="en-US" sz="1850" b="1" dirty="0">
-                <a:solidFill>
-                  <a:srgbClr val="1C1C1C"/>
-                </a:solidFill>
-                <a:latin typeface="Orbitron Bold" pitchFamily="34" charset="0"/>
-                <a:ea typeface="Orbitron Bold" pitchFamily="34" charset="-122"/>
-                <a:cs typeface="Orbitron Bold" pitchFamily="34" charset="-120"/>
-              </a:rPr>
-              <a:t>Convert on the way in</a:t>
-            </a:r>
-            <a:endParaRPr lang="en-US" sz="1850" dirty="0"/>
-          </a:p>
-        </p:txBody>
-      </p:sp>
-      <p:sp>
-        <p:nvSpPr>
-          <p:cNvPr id="10" name="Text 8"/>
-          <p:cNvSpPr/>
-          <p:nvPr/>
-        </p:nvSpPr>
-        <p:spPr>
-          <a:xfrm>
-            <a:off x="6190301" y="3313311"/>
-            <a:ext cx="5339919" cy="302419"/>
-          </a:xfrm>
-          <a:prstGeom prst="rect">
-            <a:avLst/>
-          </a:prstGeom>
-          <a:noFill/>
-          <a:ln/>
-        </p:spPr>
-        <p:txBody>
-          <a:bodyPr wrap="none" lIns="0" tIns="0" rIns="0" bIns="0" rtlCol="0" anchor="t"/>
-          <a:lstStyle/>
-          <a:p>
-            <a:pPr algn="l" indent="0" marL="0">
+          <a:p>
+            <a:pPr algn="l" marL="294640" indent="-294640">
               <a:lnSpc>
                 <a:spcPct val="133000"/>
               </a:lnSpc>
-              <a:buNone/>
+              <a:buSzPct val="100000"/>
+              <a:buChar char="•"/>
             </a:pPr>
             <a:r>
               <a:rPr lang="en-US" sz="1450" dirty="0">
@@ -2888,138 +2676,13 @@
             </a:r>
             <a:endParaRPr lang="en-US" sz="1450" dirty="0"/>
           </a:p>
-        </p:txBody>
-      </p:sp>
-      <p:sp>
-        <p:nvSpPr>
-          <p:cNvPr id="11" name="Text 9"/>
-          <p:cNvSpPr/>
-          <p:nvPr/>
-        </p:nvSpPr>
-        <p:spPr>
-          <a:xfrm>
-            <a:off x="661475" y="3946426"/>
-            <a:ext cx="378014" cy="236240"/>
-          </a:xfrm>
-          <a:prstGeom prst="rect">
-            <a:avLst/>
-          </a:prstGeom>
-          <a:noFill/>
-          <a:ln/>
-        </p:spPr>
-        <p:txBody>
-          <a:bodyPr wrap="none" lIns="0" tIns="0" rIns="0" bIns="0" rtlCol="0" anchor="ctr"/>
-          <a:lstStyle/>
-          <a:p>
-            <a:pPr algn="l" indent="0" marL="0">
-              <a:lnSpc>
-                <a:spcPct val="100000"/>
-              </a:lnSpc>
-              <a:buNone/>
-            </a:pPr>
-            <a:r>
-              <a:rPr lang="en-US" sz="1450" dirty="0">
-                <a:solidFill>
-                  <a:srgbClr val="1C1C1C"/>
-                </a:solidFill>
-                <a:latin typeface="Orbitron" pitchFamily="34" charset="0"/>
-                <a:ea typeface="Orbitron" pitchFamily="34" charset="-122"/>
-                <a:cs typeface="Orbitron" pitchFamily="34" charset="-120"/>
-              </a:rPr>
-              <a:t>03</a:t>
-            </a:r>
-            <a:endParaRPr lang="en-US" sz="1450" dirty="0"/>
-          </a:p>
-        </p:txBody>
-      </p:sp>
-      <p:sp>
-        <p:nvSpPr>
-          <p:cNvPr id="12" name="Shape 10"/>
-          <p:cNvSpPr/>
-          <p:nvPr/>
-        </p:nvSpPr>
-        <p:spPr>
-          <a:xfrm>
-            <a:off x="661475" y="4242296"/>
-            <a:ext cx="5339820" cy="25400"/>
-          </a:xfrm>
-          <a:prstGeom prst="rect">
-            <a:avLst/>
-          </a:prstGeom>
-          <a:solidFill>
-            <a:srgbClr val="57A1EB"/>
-          </a:solidFill>
-          <a:ln/>
-        </p:spPr>
-      </p:sp>
-      <p:sp>
-        <p:nvSpPr>
-          <p:cNvPr id="13" name="Text 11"/>
-          <p:cNvSpPr/>
-          <p:nvPr/>
-        </p:nvSpPr>
-        <p:spPr>
-          <a:xfrm>
-            <a:off x="661475" y="4387552"/>
-            <a:ext cx="5339820" cy="295275"/>
-          </a:xfrm>
-          <a:prstGeom prst="rect">
-            <a:avLst/>
-          </a:prstGeom>
-          <a:noFill/>
-          <a:ln/>
-        </p:spPr>
-        <p:txBody>
-          <a:bodyPr wrap="none" lIns="0" tIns="0" rIns="0" bIns="0" rtlCol="0" anchor="t"/>
-          <a:lstStyle/>
-          <a:p>
-            <a:pPr algn="l" indent="0" marL="0">
-              <a:lnSpc>
-                <a:spcPct val="104000"/>
-              </a:lnSpc>
-              <a:buNone/>
-            </a:pPr>
-            <a:r>
-              <a:rPr lang="en-US" sz="1850" b="1" dirty="0">
-                <a:solidFill>
-                  <a:srgbClr val="1C1C1C"/>
-                </a:solidFill>
-                <a:latin typeface="Orbitron Bold" pitchFamily="34" charset="0"/>
-                <a:ea typeface="Orbitron Bold" pitchFamily="34" charset="-122"/>
-                <a:cs typeface="Orbitron Bold" pitchFamily="34" charset="-120"/>
-              </a:rPr>
-              <a:t>Lab U1-01, steps seven through twelve</a:t>
-            </a:r>
-            <a:endParaRPr lang="en-US" sz="1850" dirty="0"/>
-          </a:p>
-        </p:txBody>
-      </p:sp>
-      <p:sp>
-        <p:nvSpPr>
-          <p:cNvPr id="14" name="Text 12"/>
-          <p:cNvSpPr/>
-          <p:nvPr/>
-        </p:nvSpPr>
-        <p:spPr>
-          <a:xfrm>
-            <a:off x="661475" y="4796234"/>
-            <a:ext cx="5339820" cy="302419"/>
-          </a:xfrm>
-          <a:prstGeom prst="rect">
-            <a:avLst/>
-          </a:prstGeom>
-          <a:noFill/>
-          <a:ln/>
-        </p:spPr>
-        <p:txBody>
-          <a:bodyPr wrap="none" lIns="0" tIns="0" rIns="0" bIns="0" rtlCol="0" anchor="t"/>
-          <a:lstStyle/>
-          <a:p>
-            <a:pPr algn="l" indent="0" marL="0">
+          <a:p>
+            <a:pPr algn="l" marL="294640" indent="-294640">
               <a:lnSpc>
                 <a:spcPct val="133000"/>
               </a:lnSpc>
-              <a:buNone/>
+              <a:buSzPct val="100000"/>
+              <a:buChar char="•"/>
             </a:pPr>
             <a:r>
               <a:rPr lang="en-US" sz="1450" dirty="0">
@@ -3034,138 +2697,13 @@
             </a:r>
             <a:endParaRPr lang="en-US" sz="1450" dirty="0"/>
           </a:p>
-        </p:txBody>
-      </p:sp>
-      <p:sp>
-        <p:nvSpPr>
-          <p:cNvPr id="15" name="Text 13"/>
-          <p:cNvSpPr/>
-          <p:nvPr/>
-        </p:nvSpPr>
-        <p:spPr>
-          <a:xfrm>
-            <a:off x="6190301" y="3946426"/>
-            <a:ext cx="378014" cy="236240"/>
-          </a:xfrm>
-          <a:prstGeom prst="rect">
-            <a:avLst/>
-          </a:prstGeom>
-          <a:noFill/>
-          <a:ln/>
-        </p:spPr>
-        <p:txBody>
-          <a:bodyPr wrap="none" lIns="0" tIns="0" rIns="0" bIns="0" rtlCol="0" anchor="ctr"/>
-          <a:lstStyle/>
-          <a:p>
-            <a:pPr algn="l" indent="0" marL="0">
-              <a:lnSpc>
-                <a:spcPct val="100000"/>
-              </a:lnSpc>
-              <a:buNone/>
-            </a:pPr>
-            <a:r>
-              <a:rPr lang="en-US" sz="1450" dirty="0">
-                <a:solidFill>
-                  <a:srgbClr val="1C1C1C"/>
-                </a:solidFill>
-                <a:latin typeface="Orbitron" pitchFamily="34" charset="0"/>
-                <a:ea typeface="Orbitron" pitchFamily="34" charset="-122"/>
-                <a:cs typeface="Orbitron" pitchFamily="34" charset="-120"/>
-              </a:rPr>
-              <a:t>04</a:t>
-            </a:r>
-            <a:endParaRPr lang="en-US" sz="1450" dirty="0"/>
-          </a:p>
-        </p:txBody>
-      </p:sp>
-      <p:sp>
-        <p:nvSpPr>
-          <p:cNvPr id="16" name="Shape 14"/>
-          <p:cNvSpPr/>
-          <p:nvPr/>
-        </p:nvSpPr>
-        <p:spPr>
-          <a:xfrm>
-            <a:off x="6190301" y="4242296"/>
-            <a:ext cx="5339919" cy="25400"/>
-          </a:xfrm>
-          <a:prstGeom prst="rect">
-            <a:avLst/>
-          </a:prstGeom>
-          <a:solidFill>
-            <a:srgbClr val="57A1EB"/>
-          </a:solidFill>
-          <a:ln/>
-        </p:spPr>
-      </p:sp>
-      <p:sp>
-        <p:nvSpPr>
-          <p:cNvPr id="17" name="Text 15"/>
-          <p:cNvSpPr/>
-          <p:nvPr/>
-        </p:nvSpPr>
-        <p:spPr>
-          <a:xfrm>
-            <a:off x="6190301" y="4387552"/>
-            <a:ext cx="5339919" cy="295275"/>
-          </a:xfrm>
-          <a:prstGeom prst="rect">
-            <a:avLst/>
-          </a:prstGeom>
-          <a:noFill/>
-          <a:ln/>
-        </p:spPr>
-        <p:txBody>
-          <a:bodyPr wrap="none" lIns="0" tIns="0" rIns="0" bIns="0" rtlCol="0" anchor="t"/>
-          <a:lstStyle/>
-          <a:p>
-            <a:pPr algn="l" indent="0" marL="0">
-              <a:lnSpc>
-                <a:spcPct val="104000"/>
-              </a:lnSpc>
-              <a:buNone/>
-            </a:pPr>
-            <a:r>
-              <a:rPr lang="en-US" sz="1850" b="1" dirty="0">
-                <a:solidFill>
-                  <a:srgbClr val="1C1C1C"/>
-                </a:solidFill>
-                <a:latin typeface="Orbitron Bold" pitchFamily="34" charset="0"/>
-                <a:ea typeface="Orbitron Bold" pitchFamily="34" charset="-122"/>
-                <a:cs typeface="Orbitron Bold" pitchFamily="34" charset="-120"/>
-              </a:rPr>
-              <a:t>Step eleven breaks it on purpose</a:t>
-            </a:r>
-            <a:endParaRPr lang="en-US" sz="1850" dirty="0"/>
-          </a:p>
-        </p:txBody>
-      </p:sp>
-      <p:sp>
-        <p:nvSpPr>
-          <p:cNvPr id="18" name="Text 16"/>
-          <p:cNvSpPr/>
-          <p:nvPr/>
-        </p:nvSpPr>
-        <p:spPr>
-          <a:xfrm>
-            <a:off x="6190301" y="4796234"/>
-            <a:ext cx="5339919" cy="302419"/>
-          </a:xfrm>
-          <a:prstGeom prst="rect">
-            <a:avLst/>
-          </a:prstGeom>
-          <a:noFill/>
-          <a:ln/>
-        </p:spPr>
-        <p:txBody>
-          <a:bodyPr wrap="none" lIns="0" tIns="0" rIns="0" bIns="0" rtlCol="0" anchor="t"/>
-          <a:lstStyle/>
-          <a:p>
-            <a:pPr algn="l" indent="0" marL="0">
+          <a:p>
+            <a:pPr algn="l" marL="294640" indent="-294640">
               <a:lnSpc>
                 <a:spcPct val="133000"/>
               </a:lnSpc>
-              <a:buNone/>
+              <a:buSzPct val="100000"/>
+              <a:buChar char="•"/>
             </a:pPr>
             <a:r>
               <a:rPr lang="en-US" sz="1450" dirty="0">
@@ -3184,13 +2722,13 @@
       </p:sp>
       <p:sp>
         <p:nvSpPr>
-          <p:cNvPr id="19" name="Text 17"/>
+          <p:cNvPr id="5" name="Text 2"/>
           <p:cNvSpPr/>
           <p:nvPr/>
         </p:nvSpPr>
         <p:spPr>
           <a:xfrm>
-            <a:off x="132255" y="6457255"/>
+            <a:off x="4704141" y="6457255"/>
             <a:ext cx="3640642" cy="158750"/>
           </a:xfrm>
           <a:prstGeom prst="rect">
@@ -3200,7 +2738,7 @@
           <a:ln/>
         </p:spPr>
         <p:txBody>
-          <a:bodyPr wrap="none" lIns="0" tIns="99235" rIns="59541" bIns="0" rtlCol="0" anchor="t"/>
+          <a:bodyPr wrap="none" lIns="99235" tIns="0" rIns="59541" bIns="0" rtlCol="0" anchor="t"/>
           <a:lstStyle/>
           <a:p>
             <a:pPr algn="l" indent="0" marL="0">
@@ -3335,7 +2873,7 @@
           <a:ln/>
         </p:spPr>
         <p:txBody>
-          <a:bodyPr wrap="square" lIns="0" tIns="75608" rIns="0" bIns="0" rtlCol="0" anchor="t">
+          <a:bodyPr wrap="square" lIns="0" tIns="0" rIns="0" bIns="0" rtlCol="0" anchor="t">
             <a:normAutofit/>
           </a:bodyPr>
           <a:lstStyle/>
@@ -3443,7 +2981,7 @@
           <a:ln/>
         </p:spPr>
         <p:txBody>
-          <a:bodyPr wrap="none" lIns="0" tIns="99235" rIns="59541" bIns="0" rtlCol="0" anchor="t"/>
+          <a:bodyPr wrap="none" lIns="99235" tIns="0" rIns="59541" bIns="0" rtlCol="0" anchor="t"/>
           <a:lstStyle/>
           <a:p>
             <a:pPr algn="l" indent="0" marL="0">
@@ -3492,161 +3030,9 @@
           <a:chExt cx="0" cy="0"/>
         </a:xfrm>
       </p:grpSpPr>
-      <p:sp>
-        <p:nvSpPr>
-          <p:cNvPr id="2" name="Text 0"/>
-          <p:cNvSpPr/>
-          <p:nvPr/>
-        </p:nvSpPr>
-        <p:spPr>
-          <a:xfrm>
-            <a:off x="661475" y="2039838"/>
-            <a:ext cx="5203794" cy="1181298"/>
-          </a:xfrm>
-          <a:prstGeom prst="rect">
-            <a:avLst/>
-          </a:prstGeom>
-          <a:noFill/>
-          <a:ln/>
-        </p:spPr>
-        <p:txBody>
-          <a:bodyPr wrap="square" lIns="0" tIns="0" rIns="0" bIns="0" rtlCol="0" anchor="t">
-            <a:normAutofit/>
-          </a:bodyPr>
-          <a:lstStyle/>
-          <a:p>
-            <a:pPr algn="l" indent="0" marL="0">
-              <a:lnSpc>
-                <a:spcPct val="104000"/>
-              </a:lnSpc>
-              <a:buNone/>
-            </a:pPr>
-            <a:r>
-              <a:rPr lang="en-US" sz="3700" b="1" dirty="0">
-                <a:solidFill>
-                  <a:srgbClr val="111111"/>
-                </a:solidFill>
-                <a:latin typeface="Orbitron Bold" pitchFamily="34" charset="0"/>
-                <a:ea typeface="Orbitron Bold" pitchFamily="34" charset="-122"/>
-                <a:cs typeface="Orbitron Bold" pitchFamily="34" charset="-120"/>
-              </a:rPr>
-              <a:t>Everything typed is text</a:t>
-            </a:r>
-            <a:endParaRPr lang="en-US" sz="3700" dirty="0"/>
-          </a:p>
-        </p:txBody>
-      </p:sp>
-      <p:sp>
-        <p:nvSpPr>
-          <p:cNvPr id="3" name="Text 1"/>
-          <p:cNvSpPr/>
-          <p:nvPr/>
-        </p:nvSpPr>
-        <p:spPr>
-          <a:xfrm>
-            <a:off x="661475" y="3410148"/>
-            <a:ext cx="5203794" cy="1407914"/>
-          </a:xfrm>
-          <a:prstGeom prst="rect">
-            <a:avLst/>
-          </a:prstGeom>
-          <a:noFill/>
-          <a:ln/>
-        </p:spPr>
-        <p:txBody>
-          <a:bodyPr wrap="square" lIns="0" tIns="75608" rIns="0" bIns="0" rtlCol="0" anchor="t">
-            <a:normAutofit/>
-          </a:bodyPr>
-          <a:lstStyle/>
-          <a:p>
-            <a:pPr algn="l" marL="294640" indent="-294640">
-              <a:lnSpc>
-                <a:spcPct val="133000"/>
-              </a:lnSpc>
-              <a:buSzPct val="100000"/>
-              <a:buChar char="•"/>
-            </a:pPr>
-            <a:r>
-              <a:rPr lang="en-US" sz="1450" dirty="0">
-                <a:solidFill>
-                  <a:srgbClr val="1C1C1C"/>
-                </a:solidFill>
-                <a:latin typeface="Roboto Condensed" pitchFamily="34" charset="0"/>
-                <a:ea typeface="Roboto Condensed" pitchFamily="34" charset="-122"/>
-                <a:cs typeface="Roboto Condensed" pitchFamily="34" charset="-120"/>
-              </a:rPr>
-              <a:t>input always hands back text</a:t>
-            </a:r>
-            <a:endParaRPr lang="en-US" sz="1450" dirty="0"/>
-          </a:p>
-          <a:p>
-            <a:pPr algn="l" marL="294640" indent="-294640">
-              <a:lnSpc>
-                <a:spcPct val="133000"/>
-              </a:lnSpc>
-              <a:buSzPct val="100000"/>
-              <a:buChar char="•"/>
-            </a:pPr>
-            <a:r>
-              <a:rPr lang="en-US" sz="1450" dirty="0">
-                <a:solidFill>
-                  <a:srgbClr val="1C1C1C"/>
-                </a:solidFill>
-                <a:latin typeface="Roboto Condensed" pitchFamily="34" charset="0"/>
-                <a:ea typeface="Roboto Condensed" pitchFamily="34" charset="-122"/>
-                <a:cs typeface="Roboto Condensed" pitchFamily="34" charset="-120"/>
-              </a:rPr>
-              <a:t>Always. No exceptions</a:t>
-            </a:r>
-            <a:endParaRPr lang="en-US" sz="1450" dirty="0"/>
-          </a:p>
-          <a:p>
-            <a:pPr algn="l" marL="294640" indent="-294640">
-              <a:lnSpc>
-                <a:spcPct val="133000"/>
-              </a:lnSpc>
-              <a:buSzPct val="100000"/>
-              <a:buChar char="•"/>
-            </a:pPr>
-            <a:r>
-              <a:rPr lang="en-US" sz="1450" dirty="0">
-                <a:solidFill>
-                  <a:srgbClr val="1C1C1C"/>
-                </a:solidFill>
-                <a:latin typeface="Roboto Condensed" pitchFamily="34" charset="0"/>
-                <a:ea typeface="Roboto Condensed" pitchFamily="34" charset="-122"/>
-                <a:cs typeface="Roboto Condensed" pitchFamily="34" charset="-120"/>
-              </a:rPr>
-              <a:t>Digits typed are still text</a:t>
-            </a:r>
-            <a:endParaRPr lang="en-US" sz="1450" dirty="0"/>
-          </a:p>
-          <a:p>
-            <a:pPr algn="l" marL="294640" indent="-294640">
-              <a:lnSpc>
-                <a:spcPct val="133000"/>
-              </a:lnSpc>
-              <a:buSzPct val="100000"/>
-              <a:buChar char="•"/>
-            </a:pPr>
-            <a:r>
-              <a:rPr lang="en-US" sz="1450" dirty="0">
-                <a:solidFill>
-                  <a:srgbClr val="1C1C1C"/>
-                </a:solidFill>
-                <a:latin typeface="Roboto Condensed" pitchFamily="34" charset="0"/>
-                <a:ea typeface="Roboto Condensed" pitchFamily="34" charset="-122"/>
-                <a:cs typeface="Roboto Condensed" pitchFamily="34" charset="-120"/>
-              </a:rPr>
-              <a:t>Converting is a separate step you ask for</a:t>
-            </a:r>
-            <a:endParaRPr lang="en-US" sz="1450" dirty="0"/>
-          </a:p>
-        </p:txBody>
-      </p:sp>
       <p:pic>
         <p:nvPicPr>
-          <p:cNvPr id="4" name="Image 0" descr="preencoded.png">    </p:cNvPr>
+          <p:cNvPr id="2" name="Image 0" descr="preencoded.png">    </p:cNvPr>
           <p:cNvPicPr>
             <a:picLocks noChangeAspect="1"/>
           </p:cNvPicPr>
@@ -3660,14 +3046,166 @@
         </p:blipFill>
         <p:spPr>
           <a:xfrm>
-            <a:off x="6332776" y="765572"/>
-            <a:ext cx="5203794" cy="5203924"/>
+            <a:off x="661475" y="1411585"/>
+            <a:ext cx="6903269" cy="3911898"/>
           </a:xfrm>
           <a:prstGeom prst="rect">
             <a:avLst/>
           </a:prstGeom>
         </p:spPr>
       </p:pic>
+      <p:sp>
+        <p:nvSpPr>
+          <p:cNvPr id="3" name="Text 0"/>
+          <p:cNvSpPr/>
+          <p:nvPr/>
+        </p:nvSpPr>
+        <p:spPr>
+          <a:xfrm>
+            <a:off x="8032251" y="1888629"/>
+            <a:ext cx="3504219" cy="1181298"/>
+          </a:xfrm>
+          <a:prstGeom prst="rect">
+            <a:avLst/>
+          </a:prstGeom>
+          <a:noFill/>
+          <a:ln/>
+        </p:spPr>
+        <p:txBody>
+          <a:bodyPr wrap="square" lIns="0" tIns="0" rIns="0" bIns="0" rtlCol="0" anchor="t">
+            <a:normAutofit/>
+          </a:bodyPr>
+          <a:lstStyle/>
+          <a:p>
+            <a:pPr algn="l" indent="0" marL="0">
+              <a:lnSpc>
+                <a:spcPct val="104000"/>
+              </a:lnSpc>
+              <a:buNone/>
+            </a:pPr>
+            <a:r>
+              <a:rPr lang="en-US" sz="3700" b="1" dirty="0">
+                <a:solidFill>
+                  <a:srgbClr val="111111"/>
+                </a:solidFill>
+                <a:latin typeface="Orbitron Bold" pitchFamily="34" charset="0"/>
+                <a:ea typeface="Orbitron Bold" pitchFamily="34" charset="-122"/>
+                <a:cs typeface="Orbitron Bold" pitchFamily="34" charset="-120"/>
+              </a:rPr>
+              <a:t>Everything typed is text</a:t>
+            </a:r>
+            <a:endParaRPr lang="en-US" sz="3700" dirty="0"/>
+          </a:p>
+        </p:txBody>
+      </p:sp>
+      <p:sp>
+        <p:nvSpPr>
+          <p:cNvPr id="4" name="Text 1"/>
+          <p:cNvSpPr/>
+          <p:nvPr/>
+        </p:nvSpPr>
+        <p:spPr>
+          <a:xfrm>
+            <a:off x="8032251" y="3258939"/>
+            <a:ext cx="3504219" cy="1710333"/>
+          </a:xfrm>
+          <a:prstGeom prst="rect">
+            <a:avLst/>
+          </a:prstGeom>
+          <a:noFill/>
+          <a:ln/>
+        </p:spPr>
+        <p:txBody>
+          <a:bodyPr wrap="square" lIns="0" tIns="0" rIns="0" bIns="0" rtlCol="0" anchor="t">
+            <a:normAutofit/>
+          </a:bodyPr>
+          <a:lstStyle/>
+          <a:p>
+            <a:pPr algn="l" marL="294640" indent="-294640">
+              <a:lnSpc>
+                <a:spcPct val="133000"/>
+              </a:lnSpc>
+              <a:buSzPct val="100000"/>
+              <a:buChar char="•"/>
+            </a:pPr>
+            <a:r>
+              <a:rPr lang="en-US" sz="1450" dirty="0">
+                <a:solidFill>
+                  <a:srgbClr val="1C1C1C"/>
+                </a:solidFill>
+                <a:latin typeface="Roboto Condensed" pitchFamily="34" charset="0"/>
+                <a:ea typeface="Roboto Condensed" pitchFamily="34" charset="-122"/>
+                <a:cs typeface="Roboto Condensed" pitchFamily="34" charset="-120"/>
+              </a:rPr>
+              <a:t>input always hands back text</a:t>
+            </a:r>
+            <a:endParaRPr lang="en-US" sz="1450" dirty="0"/>
+          </a:p>
+          <a:p>
+            <a:pPr algn="l" marL="294640" indent="-294640">
+              <a:lnSpc>
+                <a:spcPct val="133000"/>
+              </a:lnSpc>
+              <a:buSzPct val="100000"/>
+              <a:buChar char="•"/>
+            </a:pPr>
+            <a:r>
+              <a:rPr lang="en-US" sz="1450" dirty="0">
+                <a:solidFill>
+                  <a:srgbClr val="1C1C1C"/>
+                </a:solidFill>
+                <a:latin typeface="Roboto Condensed" pitchFamily="34" charset="0"/>
+                <a:ea typeface="Roboto Condensed" pitchFamily="34" charset="-122"/>
+                <a:cs typeface="Roboto Condensed" pitchFamily="34" charset="-120"/>
+              </a:rPr>
+              <a:t>Always. No exceptions</a:t>
+            </a:r>
+            <a:endParaRPr lang="en-US" sz="1450" dirty="0"/>
+          </a:p>
+          <a:p>
+            <a:pPr algn="l" marL="294640" indent="-294640">
+              <a:lnSpc>
+                <a:spcPct val="133000"/>
+              </a:lnSpc>
+              <a:buSzPct val="100000"/>
+              <a:buChar char="•"/>
+            </a:pPr>
+            <a:r>
+              <a:rPr lang="en-US" sz="1450" dirty="0">
+                <a:solidFill>
+                  <a:srgbClr val="1C1C1C"/>
+                </a:solidFill>
+                <a:latin typeface="Roboto Condensed" pitchFamily="34" charset="0"/>
+                <a:ea typeface="Roboto Condensed" pitchFamily="34" charset="-122"/>
+                <a:cs typeface="Roboto Condensed" pitchFamily="34" charset="-120"/>
+              </a:rPr>
+              <a:t>Digits typed are still text</a:t>
+            </a:r>
+            <a:endParaRPr lang="en-US" sz="1450" dirty="0"/>
+          </a:p>
+          <a:p>
+            <a:pPr algn="l" marL="294640" indent="-294640">
+              <a:lnSpc>
+                <a:spcPct val="133000"/>
+              </a:lnSpc>
+              <a:buSzPct val="100000"/>
+              <a:buChar char="•"/>
+            </a:pPr>
+            <a:r>
+              <a:rPr lang="en-US" sz="1450" dirty="0">
+                <a:solidFill>
+                  <a:srgbClr val="1C1C1C"/>
+                </a:solidFill>
+                <a:latin typeface="Roboto Condensed" pitchFamily="34" charset="0"/>
+                <a:ea typeface="Roboto Condensed" pitchFamily="34" charset="-122"/>
+                <a:cs typeface="Roboto Condensed" pitchFamily="34" charset="-120"/>
+              </a:rPr>
+              <a:t>Converting is a separate step you ask for</a:t>
+            </a:r>
+            <a:endParaRPr lang="en-US" sz="1450" dirty="0"/>
+          </a:p>
+        </p:txBody>
+      </p:sp>
       <p:sp>
         <p:nvSpPr>
           <p:cNvPr id="5" name="Text 2"/>
@@ -3686,7 +3224,7 @@
           <a:ln/>
         </p:spPr>
         <p:txBody>
-          <a:bodyPr wrap="none" lIns="0" tIns="99235" rIns="59541" bIns="0" rtlCol="0" anchor="t"/>
+          <a:bodyPr wrap="none" lIns="99235" tIns="0" rIns="59541" bIns="0" rtlCol="0" anchor="t"/>
           <a:lstStyle/>
           <a:p>
             <a:pPr algn="l" indent="0" marL="0">
@@ -3967,7 +3505,7 @@
           <a:ln/>
         </p:spPr>
         <p:txBody>
-          <a:bodyPr wrap="none" lIns="0" tIns="99235" rIns="59541" bIns="0" rtlCol="0" anchor="t"/>
+          <a:bodyPr wrap="none" lIns="99235" tIns="0" rIns="59541" bIns="0" rtlCol="0" anchor="t"/>
           <a:lstStyle/>
           <a:p>
             <a:pPr algn="l" indent="0" marL="0">
@@ -4162,7 +3700,7 @@
           <a:ln/>
         </p:spPr>
         <p:txBody>
-          <a:bodyPr wrap="none" lIns="0" tIns="99235" rIns="59541" bIns="0" rtlCol="0" anchor="t"/>
+          <a:bodyPr wrap="none" lIns="99235" tIns="0" rIns="59541" bIns="0" rtlCol="0" anchor="t"/>
           <a:lstStyle/>
           <a:p>
             <a:pPr algn="l" indent="0" marL="0">
@@ -4211,139 +3749,9 @@
           <a:chExt cx="0" cy="0"/>
         </a:xfrm>
       </p:grpSpPr>
-      <p:sp>
-        <p:nvSpPr>
-          <p:cNvPr id="2" name="Text 0"/>
-          <p:cNvSpPr/>
-          <p:nvPr/>
-        </p:nvSpPr>
-        <p:spPr>
-          <a:xfrm>
-            <a:off x="661475" y="2167334"/>
-            <a:ext cx="3504219" cy="1181298"/>
-          </a:xfrm>
-          <a:prstGeom prst="rect">
-            <a:avLst/>
-          </a:prstGeom>
-          <a:noFill/>
-          <a:ln/>
-        </p:spPr>
-        <p:txBody>
-          <a:bodyPr wrap="square" lIns="0" tIns="0" rIns="0" bIns="0" rtlCol="0" anchor="t">
-            <a:normAutofit/>
-          </a:bodyPr>
-          <a:lstStyle/>
-          <a:p>
-            <a:pPr algn="l" indent="0" marL="0">
-              <a:lnSpc>
-                <a:spcPct val="104000"/>
-              </a:lnSpc>
-              <a:buNone/>
-            </a:pPr>
-            <a:r>
-              <a:rPr lang="en-US" sz="3700" b="1" dirty="0">
-                <a:solidFill>
-                  <a:srgbClr val="111111"/>
-                </a:solidFill>
-                <a:latin typeface="Orbitron Bold" pitchFamily="34" charset="0"/>
-                <a:ea typeface="Orbitron Bold" pitchFamily="34" charset="-122"/>
-                <a:cs typeface="Orbitron Bold" pitchFamily="34" charset="-120"/>
-              </a:rPr>
-              <a:t>One two one two one two</a:t>
-            </a:r>
-            <a:endParaRPr lang="en-US" sz="3700" dirty="0"/>
-          </a:p>
-        </p:txBody>
-      </p:sp>
-      <p:sp>
-        <p:nvSpPr>
-          <p:cNvPr id="3" name="Shape 1"/>
-          <p:cNvSpPr/>
-          <p:nvPr/>
-        </p:nvSpPr>
-        <p:spPr>
-          <a:xfrm>
-            <a:off x="661475" y="3561259"/>
-            <a:ext cx="3504219" cy="982861"/>
-          </a:xfrm>
-          <a:prstGeom prst="roundRect">
-            <a:avLst>
-              <a:gd name="adj" fmla="val 8077"/>
-            </a:avLst>
-          </a:prstGeom>
-          <a:solidFill>
-            <a:srgbClr val="F2F2F2"/>
-          </a:solidFill>
-          <a:ln/>
-        </p:spPr>
-      </p:sp>
-      <p:sp>
-        <p:nvSpPr>
-          <p:cNvPr id="4" name="Text 2"/>
-          <p:cNvSpPr/>
-          <p:nvPr/>
-        </p:nvSpPr>
-        <p:spPr>
-          <a:xfrm>
-            <a:off x="888283" y="3750270"/>
-            <a:ext cx="3050603" cy="604838"/>
-          </a:xfrm>
-          <a:prstGeom prst="rect">
-            <a:avLst/>
-          </a:prstGeom>
-          <a:noFill/>
-          <a:ln/>
-        </p:spPr>
-        <p:txBody>
-          <a:bodyPr wrap="square" lIns="0" tIns="0" rIns="0" bIns="0" rtlCol="0" anchor="t">
-            <a:normAutofit/>
-          </a:bodyPr>
-          <a:lstStyle/>
-          <a:p>
-            <a:pPr algn="l" indent="0" marL="0">
-              <a:lnSpc>
-                <a:spcPct val="133000"/>
-              </a:lnSpc>
-              <a:buNone/>
-            </a:pPr>
-            <a:r>
-              <a:rPr lang="en-US" sz="1450" dirty="0">
-                <a:solidFill>
-                  <a:srgbClr val="24292E"/>
-                </a:solidFill>
-                <a:latin typeface="Consolas" pitchFamily="34" charset="0"/>
-                <a:ea typeface="Consolas" pitchFamily="34" charset="-122"/>
-                <a:cs typeface="Consolas" pitchFamily="34" charset="-120"/>
-              </a:rPr>
-              <a:t>How many hours did you work? 12</a:t>
-            </a:r>
-            <a:endParaRPr lang="en-US" sz="1450" dirty="0"/>
-          </a:p>
-          <a:p>
-            <a:pPr algn="l" indent="0" marL="0">
-              <a:lnSpc>
-                <a:spcPct val="133000"/>
-              </a:lnSpc>
-              <a:buNone/>
-            </a:pPr>
-            <a:r>
-              <a:rPr lang="en-US" sz="1450" dirty="0">
-                <a:solidFill>
-                  <a:srgbClr val="24292E"/>
-                </a:solidFill>
-                <a:latin typeface="Consolas" pitchFamily="34" charset="0"/>
-                <a:ea typeface="Consolas" pitchFamily="34" charset="-122"/>
-                <a:cs typeface="Consolas" pitchFamily="34" charset="-120"/>
-              </a:rPr>
-              <a:t>Three weeks of that is: 121212</a:t>
-            </a:r>
-            <a:endParaRPr lang="en-US" sz="1450" dirty="0"/>
-          </a:p>
-        </p:txBody>
-      </p:sp>
       <p:pic>
         <p:nvPicPr>
-          <p:cNvPr id="5" name="Image 0" descr="preencoded.png">    </p:cNvPr>
+          <p:cNvPr id="2" name="Image 0" descr="preencoded.png">    </p:cNvPr>
           <p:cNvPicPr>
             <a:picLocks noChangeAspect="1"/>
           </p:cNvPicPr>
@@ -4357,14 +3765,144 @@
         </p:blipFill>
         <p:spPr>
           <a:xfrm>
-            <a:off x="4633201" y="1411585"/>
-            <a:ext cx="6903269" cy="3911898"/>
+            <a:off x="7619809" y="0"/>
+            <a:ext cx="4571886" cy="6858000"/>
           </a:xfrm>
           <a:prstGeom prst="rect">
             <a:avLst/>
           </a:prstGeom>
         </p:spPr>
       </p:pic>
+      <p:sp>
+        <p:nvSpPr>
+          <p:cNvPr id="3" name="Text 0"/>
+          <p:cNvSpPr/>
+          <p:nvPr/>
+        </p:nvSpPr>
+        <p:spPr>
+          <a:xfrm>
+            <a:off x="661475" y="2143720"/>
+            <a:ext cx="6296860" cy="1181298"/>
+          </a:xfrm>
+          <a:prstGeom prst="rect">
+            <a:avLst/>
+          </a:prstGeom>
+          <a:noFill/>
+          <a:ln/>
+        </p:spPr>
+        <p:txBody>
+          <a:bodyPr wrap="square" lIns="0" tIns="0" rIns="0" bIns="0" rtlCol="0" anchor="t">
+            <a:normAutofit/>
+          </a:bodyPr>
+          <a:lstStyle/>
+          <a:p>
+            <a:pPr algn="l" indent="0" marL="0">
+              <a:lnSpc>
+                <a:spcPct val="104000"/>
+              </a:lnSpc>
+              <a:buNone/>
+            </a:pPr>
+            <a:r>
+              <a:rPr lang="en-US" sz="3700" b="1" dirty="0">
+                <a:solidFill>
+                  <a:srgbClr val="111111"/>
+                </a:solidFill>
+                <a:latin typeface="Orbitron Bold" pitchFamily="34" charset="0"/>
+                <a:ea typeface="Orbitron Bold" pitchFamily="34" charset="-122"/>
+                <a:cs typeface="Orbitron Bold" pitchFamily="34" charset="-120"/>
+              </a:rPr>
+              <a:t>One two one two one two</a:t>
+            </a:r>
+            <a:endParaRPr lang="en-US" sz="3700" dirty="0"/>
+          </a:p>
+        </p:txBody>
+      </p:sp>
+      <p:sp>
+        <p:nvSpPr>
+          <p:cNvPr id="4" name="Shape 1"/>
+          <p:cNvSpPr/>
+          <p:nvPr/>
+        </p:nvSpPr>
+        <p:spPr>
+          <a:xfrm>
+            <a:off x="661475" y="3608487"/>
+            <a:ext cx="6296860" cy="982861"/>
+          </a:xfrm>
+          <a:prstGeom prst="roundRect">
+            <a:avLst>
+              <a:gd name="adj" fmla="val 8077"/>
+            </a:avLst>
+          </a:prstGeom>
+          <a:solidFill>
+            <a:srgbClr val="F2F2F2"/>
+          </a:solidFill>
+          <a:ln/>
+        </p:spPr>
+      </p:sp>
+      <p:sp>
+        <p:nvSpPr>
+          <p:cNvPr id="5" name="Text 2"/>
+          <p:cNvSpPr/>
+          <p:nvPr/>
+        </p:nvSpPr>
+        <p:spPr>
+          <a:xfrm>
+            <a:off x="888283" y="3797498"/>
+            <a:ext cx="5843243" cy="604838"/>
+          </a:xfrm>
+          <a:prstGeom prst="rect">
+            <a:avLst/>
+          </a:prstGeom>
+          <a:noFill/>
+          <a:ln/>
+        </p:spPr>
+        <p:txBody>
+          <a:bodyPr wrap="square" lIns="0" tIns="0" rIns="0" bIns="0" rtlCol="0" anchor="t">
+            <a:normAutofit/>
+          </a:bodyPr>
+          <a:lstStyle/>
+          <a:p>
+            <a:pPr algn="l" indent="0" marL="0">
+              <a:lnSpc>
+                <a:spcPct val="133000"/>
+              </a:lnSpc>
+              <a:buNone/>
+            </a:pPr>
+            <a:r>
+              <a:rPr lang="en-US" sz="1450" dirty="0">
+                <a:solidFill>
+                  <a:srgbClr val="24292E"/>
+                </a:solidFill>
+                <a:latin typeface="Consolas" pitchFamily="34" charset="0"/>
+                <a:ea typeface="Consolas" pitchFamily="34" charset="-122"/>
+                <a:cs typeface="Consolas" pitchFamily="34" charset="-120"/>
+              </a:rPr>
+              <a:t>How many hours did you work? 12</a:t>
+            </a:r>
+            <a:endParaRPr lang="en-US" sz="1450" dirty="0"/>
+          </a:p>
+          <a:p>
+            <a:pPr algn="l" indent="0" marL="0">
+              <a:lnSpc>
+                <a:spcPct val="133000"/>
+              </a:lnSpc>
+              <a:buNone/>
+            </a:pPr>
+            <a:r>
+              <a:rPr lang="en-US" sz="1450" dirty="0">
+                <a:solidFill>
+                  <a:srgbClr val="24292E"/>
+                </a:solidFill>
+                <a:latin typeface="Consolas" pitchFamily="34" charset="0"/>
+                <a:ea typeface="Consolas" pitchFamily="34" charset="-122"/>
+                <a:cs typeface="Consolas" pitchFamily="34" charset="-120"/>
+              </a:rPr>
+              <a:t>Three weeks of that is: 121212</a:t>
+            </a:r>
+            <a:endParaRPr lang="en-US" sz="1450" dirty="0"/>
+          </a:p>
+        </p:txBody>
+      </p:sp>
       <p:sp>
         <p:nvSpPr>
           <p:cNvPr id="6" name="Text 3"/>
@@ -4383,7 +3921,7 @@
           <a:ln/>
         </p:spPr>
         <p:txBody>
-          <a:bodyPr wrap="none" lIns="0" tIns="99235" rIns="59541" bIns="0" rtlCol="0" anchor="t"/>
+          <a:bodyPr wrap="none" lIns="99235" tIns="0" rIns="59541" bIns="0" rtlCol="0" anchor="t"/>
           <a:lstStyle/>
           <a:p>
             <a:pPr algn="l" indent="0" marL="0">
@@ -4448,8 +3986,8 @@
         </p:blipFill>
         <p:spPr>
           <a:xfrm>
-            <a:off x="7619809" y="0"/>
-            <a:ext cx="4571886" cy="6858000"/>
+            <a:off x="661475" y="765572"/>
+            <a:ext cx="5203794" cy="5203924"/>
           </a:xfrm>
           <a:prstGeom prst="rect">
             <a:avLst/>
@@ -4464,8 +4002,8 @@
         </p:nvSpPr>
         <p:spPr>
           <a:xfrm>
-            <a:off x="661475" y="768052"/>
-            <a:ext cx="6296860" cy="1070570"/>
+            <a:off x="6332776" y="1744563"/>
+            <a:ext cx="5203794" cy="1771948"/>
           </a:xfrm>
           <a:prstGeom prst="rect">
             <a:avLst/>
@@ -4486,7 +4024,7 @@
               <a:buNone/>
             </a:pPr>
             <a:r>
-              <a:rPr lang="en-US" sz="3350" b="1" dirty="0">
+              <a:rPr lang="en-US" sz="3700" b="1" dirty="0">
                 <a:solidFill>
                   <a:srgbClr val="111111"/>
                 </a:solidFill>
@@ -4496,93 +4034,20 @@
               </a:rPr>
               <a:t>The dangerous bugs are the ones that do not crash</a:t>
             </a:r>
-            <a:endParaRPr lang="en-US" sz="3350" dirty="0"/>
-          </a:p>
-        </p:txBody>
-      </p:sp>
-      <p:sp>
-        <p:nvSpPr>
-          <p:cNvPr id="4" name="Shape 1"/>
+            <a:endParaRPr lang="en-US" sz="3700" dirty="0"/>
+          </a:p>
+        </p:txBody>
+      </p:sp>
+      <p:sp>
+        <p:nvSpPr>
+          <p:cNvPr id="4" name="Text 1"/>
           <p:cNvSpPr/>
           <p:nvPr/>
         </p:nvSpPr>
         <p:spPr>
           <a:xfrm>
-            <a:off x="661475" y="2071390"/>
-            <a:ext cx="6296860" cy="3895725"/>
-          </a:xfrm>
-          <a:prstGeom prst="roundRect">
-            <a:avLst>
-              <a:gd name="adj" fmla="val 1847"/>
-            </a:avLst>
-          </a:prstGeom>
-          <a:solidFill>
-            <a:srgbClr val="D1E5FA"/>
-          </a:solidFill>
-          <a:ln w="19050">
-            <a:solidFill>
-              <a:srgbClr val="B7CBE0"/>
-            </a:solidFill>
-            <a:prstDash val="solid"/>
-          </a:ln>
-        </p:spPr>
-      </p:sp>
-      <p:sp>
-        <p:nvSpPr>
-          <p:cNvPr id="5" name="Shape 2"/>
-          <p:cNvSpPr/>
-          <p:nvPr/>
-        </p:nvSpPr>
-        <p:spPr>
-          <a:xfrm>
-            <a:off x="680524" y="2090440"/>
-            <a:ext cx="6258761" cy="964406"/>
-          </a:xfrm>
-          <a:custGeom>
-            <a:avLst/>
-            <a:gdLst/>
-            <a:ahLst/>
-            <a:cxnLst/>
-            <a:rect l="l" t="t" r="r" b="b"/>
-            <a:pathLst>
-              <a:path w="6258761" h="964406">
-                <a:moveTo>
-                  <a:pt x="59954" y="0"/>
-                </a:moveTo>
-                <a:lnTo>
-                  <a:pt x="6198806" y="0"/>
-                </a:lnTo>
-                <a:arcTo hR="59956" wR="59954" stAng="16200000" swAng="5400000"/>
-                <a:lnTo>
-                  <a:pt x="6258761" y="964406"/>
-                </a:lnTo>
-                <a:lnTo>
-                  <a:pt x="0" y="964406"/>
-                </a:lnTo>
-                <a:lnTo>
-                  <a:pt x="0" y="59956"/>
-                </a:lnTo>
-                <a:arcTo hR="59956" wR="59954" stAng="10800000" swAng="5400000"/>
-                <a:close/>
-              </a:path>
-            </a:pathLst>
-          </a:custGeom>
-          <a:solidFill>
-            <a:srgbClr val="D1E5FA"/>
-          </a:solidFill>
-          <a:ln/>
-        </p:spPr>
-      </p:sp>
-      <p:sp>
-        <p:nvSpPr>
-          <p:cNvPr id="6" name="Text 3"/>
-          <p:cNvSpPr/>
-          <p:nvPr/>
-        </p:nvSpPr>
-        <p:spPr>
-          <a:xfrm>
-            <a:off x="851772" y="2261691"/>
-            <a:ext cx="5916266" cy="267593"/>
+            <a:off x="6332776" y="3705523"/>
+            <a:ext cx="5203794" cy="1407914"/>
           </a:xfrm>
           <a:prstGeom prst="rect">
             <a:avLst/>
@@ -4591,59 +4056,20 @@
           <a:ln/>
         </p:spPr>
         <p:txBody>
-          <a:bodyPr wrap="none" lIns="0" tIns="0" rIns="0" bIns="0" rtlCol="0" anchor="t"/>
-          <a:lstStyle/>
-          <a:p>
-            <a:pPr algn="l" indent="0" marL="0">
-              <a:lnSpc>
-                <a:spcPct val="104000"/>
-              </a:lnSpc>
-              <a:buNone/>
-            </a:pPr>
-            <a:r>
-              <a:rPr lang="en-US" sz="1650" b="1" dirty="0">
-                <a:solidFill>
-                  <a:srgbClr val="1C1C1C"/>
-                </a:solidFill>
-                <a:latin typeface="Orbitron Bold" pitchFamily="34" charset="0"/>
-                <a:ea typeface="Orbitron Bold" pitchFamily="34" charset="-122"/>
-                <a:cs typeface="Orbitron Bold" pitchFamily="34" charset="-120"/>
-              </a:rPr>
-              <a:t>Plus: stops</a:t>
-            </a:r>
-            <a:endParaRPr lang="en-US" sz="1650" dirty="0"/>
-          </a:p>
-        </p:txBody>
-      </p:sp>
-      <p:sp>
-        <p:nvSpPr>
-          <p:cNvPr id="7" name="Text 4"/>
-          <p:cNvSpPr/>
-          <p:nvPr/>
-        </p:nvSpPr>
-        <p:spPr>
-          <a:xfrm>
-            <a:off x="851772" y="2622352"/>
-            <a:ext cx="5916266" cy="261243"/>
-          </a:xfrm>
-          <a:prstGeom prst="rect">
-            <a:avLst/>
-          </a:prstGeom>
-          <a:noFill/>
-          <a:ln/>
-        </p:spPr>
-        <p:txBody>
-          <a:bodyPr wrap="none" lIns="0" tIns="0" rIns="0" bIns="0" rtlCol="0" anchor="t"/>
-          <a:lstStyle/>
-          <a:p>
-            <a:pPr algn="l" indent="0" marL="0">
-              <a:lnSpc>
-                <a:spcPct val="127000"/>
-              </a:lnSpc>
-              <a:buNone/>
-            </a:pPr>
-            <a:r>
-              <a:rPr lang="en-US" sz="1300" dirty="0">
+          <a:bodyPr wrap="square" lIns="0" tIns="0" rIns="0" bIns="0" rtlCol="0" anchor="t">
+            <a:normAutofit/>
+          </a:bodyPr>
+          <a:lstStyle/>
+          <a:p>
+            <a:pPr algn="l" marL="294640" indent="-294640">
+              <a:lnSpc>
+                <a:spcPct val="133000"/>
+              </a:lnSpc>
+              <a:buSzPct val="100000"/>
+              <a:buChar char="•"/>
+            </a:pPr>
+            <a:r>
+              <a:rPr lang="en-US" sz="1450" dirty="0">
                 <a:solidFill>
                   <a:srgbClr val="1C1C1C"/>
                 </a:solidFill>
@@ -4653,123 +4079,18 @@
               </a:rPr>
               <a:t>Plus between text and a number stops</a:t>
             </a:r>
-            <a:endParaRPr lang="en-US" sz="1300" dirty="0"/>
-          </a:p>
-        </p:txBody>
-      </p:sp>
-      <p:sp>
-        <p:nvSpPr>
-          <p:cNvPr id="8" name="Shape 5"/>
-          <p:cNvSpPr/>
-          <p:nvPr/>
-        </p:nvSpPr>
-        <p:spPr>
-          <a:xfrm>
-            <a:off x="680524" y="3054846"/>
-            <a:ext cx="6258761" cy="964406"/>
-          </a:xfrm>
-          <a:prstGeom prst="rect">
-            <a:avLst/>
-          </a:prstGeom>
-          <a:solidFill>
-            <a:srgbClr val="D1E5FA"/>
-          </a:solidFill>
-          <a:ln/>
-        </p:spPr>
-      </p:sp>
-      <p:sp>
-        <p:nvSpPr>
-          <p:cNvPr id="9" name="Shape 6"/>
-          <p:cNvSpPr/>
-          <p:nvPr/>
-        </p:nvSpPr>
-        <p:spPr>
-          <a:xfrm>
-            <a:off x="680524" y="3054846"/>
-            <a:ext cx="6258761" cy="19050"/>
-          </a:xfrm>
-          <a:prstGeom prst="roundRect">
-            <a:avLst>
-              <a:gd name="adj" fmla="val 49999"/>
-            </a:avLst>
-          </a:prstGeom>
-          <a:solidFill>
-            <a:srgbClr val="B7CBE0"/>
-          </a:solidFill>
-          <a:ln/>
-        </p:spPr>
-      </p:sp>
-      <p:sp>
-        <p:nvSpPr>
-          <p:cNvPr id="10" name="Text 7"/>
-          <p:cNvSpPr/>
-          <p:nvPr/>
-        </p:nvSpPr>
-        <p:spPr>
-          <a:xfrm>
-            <a:off x="851772" y="3226098"/>
-            <a:ext cx="5916266" cy="267593"/>
-          </a:xfrm>
-          <a:prstGeom prst="rect">
-            <a:avLst/>
-          </a:prstGeom>
-          <a:noFill/>
-          <a:ln/>
-        </p:spPr>
-        <p:txBody>
-          <a:bodyPr wrap="none" lIns="0" tIns="0" rIns="0" bIns="0" rtlCol="0" anchor="t"/>
-          <a:lstStyle/>
-          <a:p>
-            <a:pPr algn="l" indent="0" marL="0">
-              <a:lnSpc>
-                <a:spcPct val="104000"/>
-              </a:lnSpc>
-              <a:buNone/>
-            </a:pPr>
-            <a:r>
-              <a:rPr lang="en-US" sz="1650" b="1" dirty="0">
-                <a:solidFill>
-                  <a:srgbClr val="1C1C1C"/>
-                </a:solidFill>
-                <a:latin typeface="Orbitron Bold" pitchFamily="34" charset="0"/>
-                <a:ea typeface="Orbitron Bold" pitchFamily="34" charset="-122"/>
-                <a:cs typeface="Orbitron Bold" pitchFamily="34" charset="-120"/>
-              </a:rPr>
-              <a:t>Times: succeeds</a:t>
-            </a:r>
-            <a:endParaRPr lang="en-US" sz="1650" dirty="0"/>
-          </a:p>
-        </p:txBody>
-      </p:sp>
-      <p:sp>
-        <p:nvSpPr>
-          <p:cNvPr id="11" name="Text 8"/>
-          <p:cNvSpPr/>
-          <p:nvPr/>
-        </p:nvSpPr>
-        <p:spPr>
-          <a:xfrm>
-            <a:off x="851772" y="3586758"/>
-            <a:ext cx="5916266" cy="261243"/>
-          </a:xfrm>
-          <a:prstGeom prst="rect">
-            <a:avLst/>
-          </a:prstGeom>
-          <a:noFill/>
-          <a:ln/>
-        </p:spPr>
-        <p:txBody>
-          <a:bodyPr wrap="none" lIns="0" tIns="0" rIns="0" bIns="0" rtlCol="0" anchor="t"/>
-          <a:lstStyle/>
-          <a:p>
-            <a:pPr algn="l" indent="0" marL="0">
-              <a:lnSpc>
-                <a:spcPct val="127000"/>
-              </a:lnSpc>
-              <a:buNone/>
-            </a:pPr>
-            <a:r>
-              <a:rPr lang="en-US" sz="1300" dirty="0">
+            <a:endParaRPr lang="en-US" sz="1450" dirty="0"/>
+          </a:p>
+          <a:p>
+            <a:pPr algn="l" marL="294640" indent="-294640">
+              <a:lnSpc>
+                <a:spcPct val="133000"/>
+              </a:lnSpc>
+              <a:buSzPct val="100000"/>
+              <a:buChar char="•"/>
+            </a:pPr>
+            <a:r>
+              <a:rPr lang="en-US" sz="1450" dirty="0">
                 <a:solidFill>
                   <a:srgbClr val="1C1C1C"/>
                 </a:solidFill>
@@ -4779,123 +4100,18 @@
               </a:rPr>
               <a:t>Times between text and a number succeeds</a:t>
             </a:r>
-            <a:endParaRPr lang="en-US" sz="1300" dirty="0"/>
-          </a:p>
-        </p:txBody>
-      </p:sp>
-      <p:sp>
-        <p:nvSpPr>
-          <p:cNvPr id="12" name="Shape 9"/>
-          <p:cNvSpPr/>
-          <p:nvPr/>
-        </p:nvSpPr>
-        <p:spPr>
-          <a:xfrm>
-            <a:off x="680524" y="4019252"/>
-            <a:ext cx="6258761" cy="964406"/>
-          </a:xfrm>
-          <a:prstGeom prst="rect">
-            <a:avLst/>
-          </a:prstGeom>
-          <a:solidFill>
-            <a:srgbClr val="D1E5FA"/>
-          </a:solidFill>
-          <a:ln/>
-        </p:spPr>
-      </p:sp>
-      <p:sp>
-        <p:nvSpPr>
-          <p:cNvPr id="13" name="Shape 10"/>
-          <p:cNvSpPr/>
-          <p:nvPr/>
-        </p:nvSpPr>
-        <p:spPr>
-          <a:xfrm>
-            <a:off x="680524" y="4019252"/>
-            <a:ext cx="6258761" cy="19050"/>
-          </a:xfrm>
-          <a:prstGeom prst="roundRect">
-            <a:avLst>
-              <a:gd name="adj" fmla="val 49999"/>
-            </a:avLst>
-          </a:prstGeom>
-          <a:solidFill>
-            <a:srgbClr val="B7CBE0"/>
-          </a:solidFill>
-          <a:ln/>
-        </p:spPr>
-      </p:sp>
-      <p:sp>
-        <p:nvSpPr>
-          <p:cNvPr id="14" name="Text 11"/>
-          <p:cNvSpPr/>
-          <p:nvPr/>
-        </p:nvSpPr>
-        <p:spPr>
-          <a:xfrm>
-            <a:off x="851772" y="4190504"/>
-            <a:ext cx="5916266" cy="267593"/>
-          </a:xfrm>
-          <a:prstGeom prst="rect">
-            <a:avLst/>
-          </a:prstGeom>
-          <a:noFill/>
-          <a:ln/>
-        </p:spPr>
-        <p:txBody>
-          <a:bodyPr wrap="none" lIns="0" tIns="0" rIns="0" bIns="0" rtlCol="0" anchor="t"/>
-          <a:lstStyle/>
-          <a:p>
-            <a:pPr algn="l" indent="0" marL="0">
-              <a:lnSpc>
-                <a:spcPct val="104000"/>
-              </a:lnSpc>
-              <a:buNone/>
-            </a:pPr>
-            <a:r>
-              <a:rPr lang="en-US" sz="1650" b="1" dirty="0">
-                <a:solidFill>
-                  <a:srgbClr val="1C1C1C"/>
-                </a:solidFill>
-                <a:latin typeface="Orbitron Bold" pitchFamily="34" charset="0"/>
-                <a:ea typeface="Orbitron Bold" pitchFamily="34" charset="-122"/>
-                <a:cs typeface="Orbitron Bold" pitchFamily="34" charset="-120"/>
-              </a:rPr>
-              <a:t>One tells you</a:t>
-            </a:r>
-            <a:endParaRPr lang="en-US" sz="1650" dirty="0"/>
-          </a:p>
-        </p:txBody>
-      </p:sp>
-      <p:sp>
-        <p:nvSpPr>
-          <p:cNvPr id="15" name="Text 12"/>
-          <p:cNvSpPr/>
-          <p:nvPr/>
-        </p:nvSpPr>
-        <p:spPr>
-          <a:xfrm>
-            <a:off x="851772" y="4551164"/>
-            <a:ext cx="5916266" cy="261243"/>
-          </a:xfrm>
-          <a:prstGeom prst="rect">
-            <a:avLst/>
-          </a:prstGeom>
-          <a:noFill/>
-          <a:ln/>
-        </p:spPr>
-        <p:txBody>
-          <a:bodyPr wrap="none" lIns="0" tIns="0" rIns="0" bIns="0" rtlCol="0" anchor="t"/>
-          <a:lstStyle/>
-          <a:p>
-            <a:pPr algn="l" indent="0" marL="0">
-              <a:lnSpc>
-                <a:spcPct val="127000"/>
-              </a:lnSpc>
-              <a:buNone/>
-            </a:pPr>
-            <a:r>
-              <a:rPr lang="en-US" sz="1300" dirty="0">
+            <a:endParaRPr lang="en-US" sz="1450" dirty="0"/>
+          </a:p>
+          <a:p>
+            <a:pPr algn="l" marL="294640" indent="-294640">
+              <a:lnSpc>
+                <a:spcPct val="133000"/>
+              </a:lnSpc>
+              <a:buSzPct val="100000"/>
+              <a:buChar char="•"/>
+            </a:pPr>
+            <a:r>
+              <a:rPr lang="en-US" sz="1450" dirty="0">
                 <a:solidFill>
                   <a:srgbClr val="1C1C1C"/>
                 </a:solidFill>
@@ -4905,149 +4121,18 @@
               </a:rPr>
               <a:t>One tells you immediately</a:t>
             </a:r>
-            <a:endParaRPr lang="en-US" sz="1300" dirty="0"/>
-          </a:p>
-        </p:txBody>
-      </p:sp>
-      <p:sp>
-        <p:nvSpPr>
-          <p:cNvPr id="16" name="Shape 13"/>
-          <p:cNvSpPr/>
-          <p:nvPr/>
-        </p:nvSpPr>
-        <p:spPr>
-          <a:xfrm>
-            <a:off x="680524" y="4983659"/>
-            <a:ext cx="6258761" cy="964406"/>
-          </a:xfrm>
-          <a:custGeom>
-            <a:avLst/>
-            <a:gdLst/>
-            <a:ahLst/>
-            <a:cxnLst/>
-            <a:rect l="l" t="t" r="r" b="b"/>
-            <a:pathLst>
-              <a:path w="6258761" h="964406">
-                <a:moveTo>
-                  <a:pt x="0" y="0"/>
-                </a:moveTo>
-                <a:lnTo>
-                  <a:pt x="6258761" y="0"/>
-                </a:lnTo>
-                <a:lnTo>
-                  <a:pt x="6258761" y="904450"/>
-                </a:lnTo>
-                <a:arcTo hR="59956" wR="59954" stAng="0" swAng="5400000"/>
-                <a:lnTo>
-                  <a:pt x="59954" y="964406"/>
-                </a:lnTo>
-                <a:arcTo hR="59956" wR="59954" stAng="5400000" swAng="5400000"/>
-                <a:lnTo>
-                  <a:pt x="0" y="0"/>
-                </a:lnTo>
-                <a:close/>
-              </a:path>
-            </a:pathLst>
-          </a:custGeom>
-          <a:solidFill>
-            <a:srgbClr val="D1E5FA"/>
-          </a:solidFill>
-          <a:ln/>
-        </p:spPr>
-      </p:sp>
-      <p:sp>
-        <p:nvSpPr>
-          <p:cNvPr id="17" name="Shape 14"/>
-          <p:cNvSpPr/>
-          <p:nvPr/>
-        </p:nvSpPr>
-        <p:spPr>
-          <a:xfrm>
-            <a:off x="680524" y="4983659"/>
-            <a:ext cx="6258761" cy="19050"/>
-          </a:xfrm>
-          <a:prstGeom prst="roundRect">
-            <a:avLst>
-              <a:gd name="adj" fmla="val 49999"/>
-            </a:avLst>
-          </a:prstGeom>
-          <a:solidFill>
-            <a:srgbClr val="B7CBE0"/>
-          </a:solidFill>
-          <a:ln/>
-        </p:spPr>
-      </p:sp>
-      <p:sp>
-        <p:nvSpPr>
-          <p:cNvPr id="18" name="Text 15"/>
-          <p:cNvSpPr/>
-          <p:nvPr/>
-        </p:nvSpPr>
-        <p:spPr>
-          <a:xfrm>
-            <a:off x="851772" y="5154910"/>
-            <a:ext cx="5916266" cy="267593"/>
-          </a:xfrm>
-          <a:prstGeom prst="rect">
-            <a:avLst/>
-          </a:prstGeom>
-          <a:noFill/>
-          <a:ln/>
-        </p:spPr>
-        <p:txBody>
-          <a:bodyPr wrap="none" lIns="0" tIns="0" rIns="0" bIns="0" rtlCol="0" anchor="t"/>
-          <a:lstStyle/>
-          <a:p>
-            <a:pPr algn="l" indent="0" marL="0">
-              <a:lnSpc>
-                <a:spcPct val="104000"/>
-              </a:lnSpc>
-              <a:buNone/>
-            </a:pPr>
-            <a:r>
-              <a:rPr lang="en-US" sz="1650" b="1" dirty="0">
-                <a:solidFill>
-                  <a:srgbClr val="1C1C1C"/>
-                </a:solidFill>
-                <a:latin typeface="Orbitron Bold" pitchFamily="34" charset="0"/>
-                <a:ea typeface="Orbitron Bold" pitchFamily="34" charset="-122"/>
-                <a:cs typeface="Orbitron Bold" pitchFamily="34" charset="-120"/>
-              </a:rPr>
-              <a:t>The other lies</a:t>
-            </a:r>
-            <a:endParaRPr lang="en-US" sz="1650" dirty="0"/>
-          </a:p>
-        </p:txBody>
-      </p:sp>
-      <p:sp>
-        <p:nvSpPr>
-          <p:cNvPr id="19" name="Text 16"/>
-          <p:cNvSpPr/>
-          <p:nvPr/>
-        </p:nvSpPr>
-        <p:spPr>
-          <a:xfrm>
-            <a:off x="851772" y="5515570"/>
-            <a:ext cx="5916266" cy="261243"/>
-          </a:xfrm>
-          <a:prstGeom prst="rect">
-            <a:avLst/>
-          </a:prstGeom>
-          <a:noFill/>
-          <a:ln/>
-        </p:spPr>
-        <p:txBody>
-          <a:bodyPr wrap="none" lIns="0" tIns="0" rIns="0" bIns="0" rtlCol="0" anchor="t"/>
-          <a:lstStyle/>
-          <a:p>
-            <a:pPr algn="l" indent="0" marL="0">
-              <a:lnSpc>
-                <a:spcPct val="127000"/>
-              </a:lnSpc>
-              <a:buNone/>
-            </a:pPr>
-            <a:r>
-              <a:rPr lang="en-US" sz="1300" dirty="0">
+            <a:endParaRPr lang="en-US" sz="1450" dirty="0"/>
+          </a:p>
+          <a:p>
+            <a:pPr algn="l" marL="294640" indent="-294640">
+              <a:lnSpc>
+                <a:spcPct val="133000"/>
+              </a:lnSpc>
+              <a:buSzPct val="100000"/>
+              <a:buChar char="•"/>
+            </a:pPr>
+            <a:r>
+              <a:rPr lang="en-US" sz="1450" dirty="0">
                 <a:solidFill>
                   <a:srgbClr val="1C1C1C"/>
                 </a:solidFill>
@@ -5057,13 +4142,13 @@
               </a:rPr>
               <a:t>The other hands you garbage and says nothing</a:t>
             </a:r>
-            <a:endParaRPr lang="en-US" sz="1300" dirty="0"/>
-          </a:p>
-        </p:txBody>
-      </p:sp>
-      <p:sp>
-        <p:nvSpPr>
-          <p:cNvPr id="20" name="Text 17"/>
+            <a:endParaRPr lang="en-US" sz="1450" dirty="0"/>
+          </a:p>
+        </p:txBody>
+      </p:sp>
+      <p:sp>
+        <p:nvSpPr>
+          <p:cNvPr id="5" name="Text 2"/>
           <p:cNvSpPr/>
           <p:nvPr/>
         </p:nvSpPr>
@@ -5079,7 +4164,7 @@
           <a:ln/>
         </p:spPr>
         <p:txBody>
-          <a:bodyPr wrap="none" lIns="0" tIns="99235" rIns="59541" bIns="0" rtlCol="0" anchor="t"/>
+          <a:bodyPr wrap="none" lIns="99235" tIns="0" rIns="59541" bIns="0" rtlCol="0" anchor="t"/>
           <a:lstStyle/>
           <a:p>
             <a:pPr algn="l" indent="0" marL="0">
@@ -5360,7 +4445,7 @@
           <a:ln/>
         </p:spPr>
         <p:txBody>
-          <a:bodyPr wrap="none" lIns="0" tIns="99235" rIns="59541" bIns="0" rtlCol="0" anchor="t"/>
+          <a:bodyPr wrap="none" lIns="99235" tIns="0" rIns="59541" bIns="0" rtlCol="0" anchor="t"/>
           <a:lstStyle/>
           <a:p>
             <a:pPr algn="l" indent="0" marL="0">
@@ -5409,161 +4494,9 @@
           <a:chExt cx="0" cy="0"/>
         </a:xfrm>
       </p:grpSpPr>
-      <p:sp>
-        <p:nvSpPr>
-          <p:cNvPr id="2" name="Text 0"/>
-          <p:cNvSpPr/>
-          <p:nvPr/>
-        </p:nvSpPr>
-        <p:spPr>
-          <a:xfrm>
-            <a:off x="661475" y="1744563"/>
-            <a:ext cx="5203794" cy="1771948"/>
-          </a:xfrm>
-          <a:prstGeom prst="rect">
-            <a:avLst/>
-          </a:prstGeom>
-          <a:noFill/>
-          <a:ln/>
-        </p:spPr>
-        <p:txBody>
-          <a:bodyPr wrap="square" lIns="0" tIns="0" rIns="0" bIns="0" rtlCol="0" anchor="t">
-            <a:normAutofit/>
-          </a:bodyPr>
-          <a:lstStyle/>
-          <a:p>
-            <a:pPr algn="l" indent="0" marL="0">
-              <a:lnSpc>
-                <a:spcPct val="104000"/>
-              </a:lnSpc>
-              <a:buNone/>
-            </a:pPr>
-            <a:r>
-              <a:rPr lang="en-US" sz="3700" b="1" dirty="0">
-                <a:solidFill>
-                  <a:srgbClr val="111111"/>
-                </a:solidFill>
-                <a:latin typeface="Orbitron Bold" pitchFamily="34" charset="0"/>
-                <a:ea typeface="Orbitron Bold" pitchFamily="34" charset="-122"/>
-                <a:cs typeface="Orbitron Bold" pitchFamily="34" charset="-120"/>
-              </a:rPr>
-              <a:t>Which converter, and it is a real decision</a:t>
-            </a:r>
-            <a:endParaRPr lang="en-US" sz="3700" dirty="0"/>
-          </a:p>
-        </p:txBody>
-      </p:sp>
-      <p:sp>
-        <p:nvSpPr>
-          <p:cNvPr id="3" name="Text 1"/>
-          <p:cNvSpPr/>
-          <p:nvPr/>
-        </p:nvSpPr>
-        <p:spPr>
-          <a:xfrm>
-            <a:off x="661475" y="3705523"/>
-            <a:ext cx="5203794" cy="1407914"/>
-          </a:xfrm>
-          <a:prstGeom prst="rect">
-            <a:avLst/>
-          </a:prstGeom>
-          <a:noFill/>
-          <a:ln/>
-        </p:spPr>
-        <p:txBody>
-          <a:bodyPr wrap="square" lIns="0" tIns="75608" rIns="0" bIns="0" rtlCol="0" anchor="t">
-            <a:normAutofit/>
-          </a:bodyPr>
-          <a:lstStyle/>
-          <a:p>
-            <a:pPr algn="l" marL="294640" indent="-294640">
-              <a:lnSpc>
-                <a:spcPct val="133000"/>
-              </a:lnSpc>
-              <a:buSzPct val="100000"/>
-              <a:buChar char="•"/>
-            </a:pPr>
-            <a:r>
-              <a:rPr lang="en-US" sz="1450" dirty="0">
-                <a:solidFill>
-                  <a:srgbClr val="1C1C1C"/>
-                </a:solidFill>
-                <a:latin typeface="Roboto Condensed" pitchFamily="34" charset="0"/>
-                <a:ea typeface="Roboto Condensed" pitchFamily="34" charset="-122"/>
-                <a:cs typeface="Roboto Condensed" pitchFamily="34" charset="-120"/>
-              </a:rPr>
-              <a:t>int for things that cannot be half</a:t>
-            </a:r>
-            <a:endParaRPr lang="en-US" sz="1450" dirty="0"/>
-          </a:p>
-          <a:p>
-            <a:pPr algn="l" marL="294640" indent="-294640">
-              <a:lnSpc>
-                <a:spcPct val="133000"/>
-              </a:lnSpc>
-              <a:buSzPct val="100000"/>
-              <a:buChar char="•"/>
-            </a:pPr>
-            <a:r>
-              <a:rPr lang="en-US" sz="1450" dirty="0">
-                <a:solidFill>
-                  <a:srgbClr val="1C1C1C"/>
-                </a:solidFill>
-                <a:latin typeface="Roboto Condensed" pitchFamily="34" charset="0"/>
-                <a:ea typeface="Roboto Condensed" pitchFamily="34" charset="-122"/>
-                <a:cs typeface="Roboto Condensed" pitchFamily="34" charset="-120"/>
-              </a:rPr>
-              <a:t>float for things that can</a:t>
-            </a:r>
-            <a:endParaRPr lang="en-US" sz="1450" dirty="0"/>
-          </a:p>
-          <a:p>
-            <a:pPr algn="l" marL="294640" indent="-294640">
-              <a:lnSpc>
-                <a:spcPct val="133000"/>
-              </a:lnSpc>
-              <a:buSzPct val="100000"/>
-              <a:buChar char="•"/>
-            </a:pPr>
-            <a:r>
-              <a:rPr lang="en-US" sz="1450" dirty="0">
-                <a:solidFill>
-                  <a:srgbClr val="1C1C1C"/>
-                </a:solidFill>
-                <a:latin typeface="Roboto Condensed" pitchFamily="34" charset="0"/>
-                <a:ea typeface="Roboto Condensed" pitchFamily="34" charset="-122"/>
-                <a:cs typeface="Roboto Condensed" pitchFamily="34" charset="-120"/>
-              </a:rPr>
-              <a:t>People splitting a bill: int</a:t>
-            </a:r>
-            <a:endParaRPr lang="en-US" sz="1450" dirty="0"/>
-          </a:p>
-          <a:p>
-            <a:pPr algn="l" marL="294640" indent="-294640">
-              <a:lnSpc>
-                <a:spcPct val="133000"/>
-              </a:lnSpc>
-              <a:buSzPct val="100000"/>
-              <a:buChar char="•"/>
-            </a:pPr>
-            <a:r>
-              <a:rPr lang="en-US" sz="1450" dirty="0">
-                <a:solidFill>
-                  <a:srgbClr val="1C1C1C"/>
-                </a:solidFill>
-                <a:latin typeface="Roboto Condensed" pitchFamily="34" charset="0"/>
-                <a:ea typeface="Roboto Condensed" pitchFamily="34" charset="-122"/>
-                <a:cs typeface="Roboto Condensed" pitchFamily="34" charset="-120"/>
-              </a:rPr>
-              <a:t>Hours worked: float, because 7.5 is real</a:t>
-            </a:r>
-            <a:endParaRPr lang="en-US" sz="1450" dirty="0"/>
-          </a:p>
-        </p:txBody>
-      </p:sp>
       <p:pic>
         <p:nvPicPr>
-          <p:cNvPr id="4" name="Image 0" descr="preencoded.png">    </p:cNvPr>
+          <p:cNvPr id="2" name="Image 0" descr="preencoded.png">    </p:cNvPr>
           <p:cNvPicPr>
             <a:picLocks noChangeAspect="1"/>
           </p:cNvPicPr>
@@ -5577,14 +4510,85 @@
         </p:blipFill>
         <p:spPr>
           <a:xfrm>
-            <a:off x="6332776" y="765572"/>
-            <a:ext cx="5203794" cy="5203924"/>
+            <a:off x="7619809" y="0"/>
+            <a:ext cx="4571886" cy="6858000"/>
           </a:xfrm>
           <a:prstGeom prst="rect">
             <a:avLst/>
           </a:prstGeom>
         </p:spPr>
       </p:pic>
+      <p:sp>
+        <p:nvSpPr>
+          <p:cNvPr id="3" name="Text 0"/>
+          <p:cNvSpPr/>
+          <p:nvPr/>
+        </p:nvSpPr>
+        <p:spPr>
+          <a:xfrm>
+            <a:off x="661475" y="997645"/>
+            <a:ext cx="6296860" cy="1181298"/>
+          </a:xfrm>
+          <a:prstGeom prst="rect">
+            <a:avLst/>
+          </a:prstGeom>
+          <a:noFill/>
+          <a:ln/>
+        </p:spPr>
+        <p:txBody>
+          <a:bodyPr wrap="square" lIns="0" tIns="0" rIns="0" bIns="0" rtlCol="0" anchor="t">
+            <a:normAutofit/>
+          </a:bodyPr>
+          <a:lstStyle/>
+          <a:p>
+            <a:pPr algn="l" indent="0" marL="0">
+              <a:lnSpc>
+                <a:spcPct val="104000"/>
+              </a:lnSpc>
+              <a:buNone/>
+            </a:pPr>
+            <a:r>
+              <a:rPr lang="en-US" sz="3700" b="1" dirty="0">
+                <a:solidFill>
+                  <a:srgbClr val="111111"/>
+                </a:solidFill>
+                <a:latin typeface="Orbitron Bold" pitchFamily="34" charset="0"/>
+                <a:ea typeface="Orbitron Bold" pitchFamily="34" charset="-122"/>
+                <a:cs typeface="Orbitron Bold" pitchFamily="34" charset="-120"/>
+              </a:rPr>
+              <a:t>Which converter, and it is a real decision</a:t>
+            </a:r>
+            <a:endParaRPr lang="en-US" sz="3700" dirty="0"/>
+          </a:p>
+        </p:txBody>
+      </p:sp>
+      <p:sp>
+        <p:nvSpPr>
+          <p:cNvPr id="4" name="Shape 1"/>
+          <p:cNvSpPr/>
+          <p:nvPr/>
+        </p:nvSpPr>
+        <p:spPr>
+          <a:xfrm>
+            <a:off x="661475" y="2462411"/>
+            <a:ext cx="6296860" cy="1543050"/>
+          </a:xfrm>
+          <a:prstGeom prst="roundRect">
+            <a:avLst>
+              <a:gd name="adj" fmla="val 5145"/>
+            </a:avLst>
+          </a:prstGeom>
+          <a:solidFill>
+            <a:srgbClr val="D1E5FA"/>
+          </a:solidFill>
+          <a:ln w="19050">
+            <a:solidFill>
+              <a:srgbClr val="B7CBE0"/>
+            </a:solidFill>
+            <a:prstDash val="solid"/>
+          </a:ln>
+        </p:spPr>
+      </p:sp>
       <p:sp>
         <p:nvSpPr>
           <p:cNvPr id="5" name="Text 2"/>
@@ -5593,6 +4597,247 @@
         </p:nvSpPr>
         <p:spPr>
           <a:xfrm>
+            <a:off x="869531" y="2670473"/>
+            <a:ext cx="5880747" cy="295275"/>
+          </a:xfrm>
+          <a:prstGeom prst="rect">
+            <a:avLst/>
+          </a:prstGeom>
+          <a:noFill/>
+          <a:ln/>
+        </p:spPr>
+        <p:txBody>
+          <a:bodyPr wrap="none" lIns="0" tIns="0" rIns="0" bIns="0" rtlCol="0" anchor="t"/>
+          <a:lstStyle/>
+          <a:p>
+            <a:pPr algn="l" indent="0" marL="0">
+              <a:lnSpc>
+                <a:spcPct val="104000"/>
+              </a:lnSpc>
+              <a:buNone/>
+            </a:pPr>
+            <a:r>
+              <a:rPr lang="en-US" sz="1850" b="1" dirty="0">
+                <a:solidFill>
+                  <a:srgbClr val="1C1C1C"/>
+                </a:solidFill>
+                <a:latin typeface="Orbitron Bold" pitchFamily="34" charset="0"/>
+                <a:ea typeface="Orbitron Bold" pitchFamily="34" charset="-122"/>
+                <a:cs typeface="Orbitron Bold" pitchFamily="34" charset="-120"/>
+              </a:rPr>
+              <a:t>int</a:t>
+            </a:r>
+            <a:endParaRPr lang="en-US" sz="1850" dirty="0"/>
+          </a:p>
+        </p:txBody>
+      </p:sp>
+      <p:sp>
+        <p:nvSpPr>
+          <p:cNvPr id="6" name="Text 3"/>
+          <p:cNvSpPr/>
+          <p:nvPr/>
+        </p:nvSpPr>
+        <p:spPr>
+          <a:xfrm>
+            <a:off x="869531" y="3079155"/>
+            <a:ext cx="5880747" cy="718245"/>
+          </a:xfrm>
+          <a:prstGeom prst="rect">
+            <a:avLst/>
+          </a:prstGeom>
+          <a:noFill/>
+          <a:ln/>
+        </p:spPr>
+        <p:txBody>
+          <a:bodyPr wrap="square" lIns="0" tIns="0" rIns="0" bIns="0" rtlCol="0" anchor="t"/>
+          <a:lstStyle/>
+          <a:p>
+            <a:pPr algn="l" indent="0" marL="0">
+              <a:lnSpc>
+                <a:spcPct val="133000"/>
+              </a:lnSpc>
+              <a:spcAft>
+                <a:spcPts val="850"/>
+              </a:spcAft>
+              <a:buNone/>
+            </a:pPr>
+            <a:r>
+              <a:rPr lang="en-US" sz="1450" dirty="0">
+                <a:solidFill>
+                  <a:srgbClr val="1C1C1C"/>
+                </a:solidFill>
+                <a:latin typeface="Roboto Condensed" pitchFamily="34" charset="0"/>
+                <a:ea typeface="Roboto Condensed" pitchFamily="34" charset="-122"/>
+                <a:cs typeface="Roboto Condensed" pitchFamily="34" charset="-120"/>
+              </a:rPr>
+              <a:t>For things that cannot be half</a:t>
+            </a:r>
+            <a:endParaRPr lang="en-US" sz="1450" dirty="0"/>
+          </a:p>
+          <a:p>
+            <a:pPr algn="l" indent="0" marL="0">
+              <a:lnSpc>
+                <a:spcPct val="133000"/>
+              </a:lnSpc>
+              <a:buNone/>
+            </a:pPr>
+            <a:r>
+              <a:rPr lang="en-US" sz="1450" dirty="0">
+                <a:solidFill>
+                  <a:srgbClr val="1C1C1C"/>
+                </a:solidFill>
+                <a:latin typeface="Roboto Condensed" pitchFamily="34" charset="0"/>
+                <a:ea typeface="Roboto Condensed" pitchFamily="34" charset="-122"/>
+                <a:cs typeface="Roboto Condensed" pitchFamily="34" charset="-120"/>
+              </a:rPr>
+              <a:t>People splitting a bill</a:t>
+            </a:r>
+            <a:endParaRPr lang="en-US" sz="1450" dirty="0"/>
+          </a:p>
+        </p:txBody>
+      </p:sp>
+      <p:sp>
+        <p:nvSpPr>
+          <p:cNvPr id="7" name="Shape 4"/>
+          <p:cNvSpPr/>
+          <p:nvPr/>
+        </p:nvSpPr>
+        <p:spPr>
+          <a:xfrm>
+            <a:off x="661475" y="4194473"/>
+            <a:ext cx="6296860" cy="1543050"/>
+          </a:xfrm>
+          <a:prstGeom prst="roundRect">
+            <a:avLst>
+              <a:gd name="adj" fmla="val 5145"/>
+            </a:avLst>
+          </a:prstGeom>
+          <a:solidFill>
+            <a:srgbClr val="D1E5FA"/>
+          </a:solidFill>
+          <a:ln w="19050">
+            <a:solidFill>
+              <a:srgbClr val="B7CBE0"/>
+            </a:solidFill>
+            <a:prstDash val="solid"/>
+          </a:ln>
+        </p:spPr>
+      </p:sp>
+      <p:sp>
+        <p:nvSpPr>
+          <p:cNvPr id="8" name="Text 5"/>
+          <p:cNvSpPr/>
+          <p:nvPr/>
+        </p:nvSpPr>
+        <p:spPr>
+          <a:xfrm>
+            <a:off x="869531" y="4402534"/>
+            <a:ext cx="5880747" cy="295275"/>
+          </a:xfrm>
+          <a:prstGeom prst="rect">
+            <a:avLst/>
+          </a:prstGeom>
+          <a:noFill/>
+          <a:ln/>
+        </p:spPr>
+        <p:txBody>
+          <a:bodyPr wrap="none" lIns="0" tIns="0" rIns="0" bIns="0" rtlCol="0" anchor="t"/>
+          <a:lstStyle/>
+          <a:p>
+            <a:pPr algn="l" indent="0" marL="0">
+              <a:lnSpc>
+                <a:spcPct val="104000"/>
+              </a:lnSpc>
+              <a:buNone/>
+            </a:pPr>
+            <a:r>
+              <a:rPr lang="en-US" sz="1850" b="1" dirty="0">
+                <a:solidFill>
+                  <a:srgbClr val="1C1C1C"/>
+                </a:solidFill>
+                <a:latin typeface="Orbitron Bold" pitchFamily="34" charset="0"/>
+                <a:ea typeface="Orbitron Bold" pitchFamily="34" charset="-122"/>
+                <a:cs typeface="Orbitron Bold" pitchFamily="34" charset="-120"/>
+              </a:rPr>
+              <a:t>float</a:t>
+            </a:r>
+            <a:endParaRPr lang="en-US" sz="1850" dirty="0"/>
+          </a:p>
+        </p:txBody>
+      </p:sp>
+      <p:sp>
+        <p:nvSpPr>
+          <p:cNvPr id="9" name="Text 6"/>
+          <p:cNvSpPr/>
+          <p:nvPr/>
+        </p:nvSpPr>
+        <p:spPr>
+          <a:xfrm>
+            <a:off x="869531" y="4811216"/>
+            <a:ext cx="5880747" cy="718245"/>
+          </a:xfrm>
+          <a:prstGeom prst="rect">
+            <a:avLst/>
+          </a:prstGeom>
+          <a:noFill/>
+          <a:ln/>
+        </p:spPr>
+        <p:txBody>
+          <a:bodyPr wrap="square" lIns="0" tIns="0" rIns="0" bIns="0" rtlCol="0" anchor="t"/>
+          <a:lstStyle/>
+          <a:p>
+            <a:pPr algn="l" indent="0" marL="0">
+              <a:lnSpc>
+                <a:spcPct val="133000"/>
+              </a:lnSpc>
+              <a:spcAft>
+                <a:spcPts val="850"/>
+              </a:spcAft>
+              <a:buNone/>
+            </a:pPr>
+            <a:r>
+              <a:rPr lang="en-US" sz="1450" dirty="0">
+                <a:solidFill>
+                  <a:srgbClr val="1C1C1C"/>
+                </a:solidFill>
+                <a:latin typeface="Roboto Condensed" pitchFamily="34" charset="0"/>
+                <a:ea typeface="Roboto Condensed" pitchFamily="34" charset="-122"/>
+                <a:cs typeface="Roboto Condensed" pitchFamily="34" charset="-120"/>
+              </a:rPr>
+              <a:t>For things that can be half</a:t>
+            </a:r>
+            <a:endParaRPr lang="en-US" sz="1450" dirty="0"/>
+          </a:p>
+          <a:p>
+            <a:pPr algn="l" indent="0" marL="0">
+              <a:lnSpc>
+                <a:spcPct val="133000"/>
+              </a:lnSpc>
+              <a:buNone/>
+            </a:pPr>
+            <a:r>
+              <a:rPr lang="en-US" sz="1450" dirty="0">
+                <a:solidFill>
+                  <a:srgbClr val="1C1C1C"/>
+                </a:solidFill>
+                <a:latin typeface="Roboto Condensed" pitchFamily="34" charset="0"/>
+                <a:ea typeface="Roboto Condensed" pitchFamily="34" charset="-122"/>
+                <a:cs typeface="Roboto Condensed" pitchFamily="34" charset="-120"/>
+              </a:rPr>
+              <a:t>Hours worked, because 7.5 is real</a:t>
+            </a:r>
+            <a:endParaRPr lang="en-US" sz="1450" dirty="0"/>
+          </a:p>
+        </p:txBody>
+      </p:sp>
+      <p:sp>
+        <p:nvSpPr>
+          <p:cNvPr id="10" name="Text 7"/>
+          <p:cNvSpPr/>
+          <p:nvPr/>
+        </p:nvSpPr>
+        <p:spPr>
+          <a:xfrm>
             <a:off x="132255" y="6457255"/>
             <a:ext cx="3640642" cy="158750"/>
           </a:xfrm>
@@ -5603,7 +4848,7 @@
           <a:ln/>
         </p:spPr>
         <p:txBody>
-          <a:bodyPr wrap="none" lIns="0" tIns="99235" rIns="59541" bIns="0" rtlCol="0" anchor="t"/>
+          <a:bodyPr wrap="none" lIns="99235" tIns="0" rIns="59541" bIns="0" rtlCol="0" anchor="t"/>
           <a:lstStyle/>
           <a:p>
             <a:pPr algn="l" indent="0" marL="0">
